--- a/projects/测试DEMO/最终文档/ppt_slides/slide_04.pptx
+++ b/projects/测试DEMO/最终文档/ppt_slides/slide_04.pptx
@@ -3081,14 +3081,6 @@
 <file path=ppt/slides/slide1.xml><?xml version="1.0" encoding="utf-8"?>
 <p:sld xmlns:a="http://schemas.openxmlformats.org/drawingml/2006/main" xmlns:p="http://schemas.openxmlformats.org/presentationml/2006/main" xmlns:r="http://schemas.openxmlformats.org/officeDocument/2006/relationships">
   <p:cSld>
-    <p:bg>
-      <p:bgPr>
-        <a:solidFill>
-          <a:srgbClr val="0A1428"/>
-        </a:solidFill>
-        <a:effectLst/>
-      </p:bgPr>
-    </p:bg>
     <p:spTree>
       <p:nvGrpSpPr>
         <p:cNvPr id="1" name=""/>
@@ -3098,14 +3090,59 @@
       <p:grpSpPr/>
       <p:sp>
         <p:nvSpPr>
-          <p:cNvPr id="2" name="TextBox 1"/>
+          <p:cNvPr id="2" name="Rounded Rectangle 1"/>
+          <p:cNvSpPr/>
+          <p:nvPr/>
+        </p:nvSpPr>
+        <p:spPr>
+          <a:xfrm>
+            <a:off x="274320" y="274320"/>
+            <a:ext cx="11643055" cy="6309360"/>
+          </a:xfrm>
+          <a:prstGeom prst="roundRect">
+            <a:avLst/>
+          </a:prstGeom>
+          <a:solidFill>
+            <a:srgbClr val="FFFFFF"/>
+          </a:solidFill>
+          <a:ln>
+            <a:solidFill>
+              <a:srgbClr val="E0E0E0"/>
+            </a:solidFill>
+          </a:ln>
+        </p:spPr>
+        <p:style>
+          <a:lnRef idx="1">
+            <a:schemeClr val="accent1"/>
+          </a:lnRef>
+          <a:fillRef idx="3">
+            <a:schemeClr val="accent1"/>
+          </a:fillRef>
+          <a:effectRef idx="2">
+            <a:schemeClr val="accent1"/>
+          </a:effectRef>
+          <a:fontRef idx="minor">
+            <a:schemeClr val="lt1"/>
+          </a:fontRef>
+        </p:style>
+        <p:txBody>
+          <a:bodyPr rtlCol="0" anchor="ctr"/>
+          <a:lstStyle/>
+          <a:p>
+            <a:pPr algn="ctr"/>
+          </a:p>
+        </p:txBody>
+      </p:sp>
+      <p:sp>
+        <p:nvSpPr>
+          <p:cNvPr id="3" name="TextBox 2"/>
           <p:cNvSpPr txBox="1"/>
           <p:nvPr/>
         </p:nvSpPr>
         <p:spPr>
           <a:xfrm>
-            <a:off x="457200" y="365760"/>
-            <a:ext cx="9144000" cy="731520"/>
+            <a:off x="548640" y="457200"/>
+            <a:ext cx="7315200" cy="548640"/>
           </a:xfrm>
           <a:prstGeom prst="rect">
             <a:avLst/>
@@ -3119,29 +3156,29 @@
           <a:lstStyle/>
           <a:p>
             <a:pPr>
-              <a:defRPr sz="3200" b="1">
+              <a:defRPr sz="2800" b="1">
                 <a:solidFill>
-                  <a:srgbClr val="FFDF8C"/>
+                  <a:srgbClr val="0F2B5B"/>
                 </a:solidFill>
                 <a:latin typeface="Microsoft YaHei"/>
               </a:defRPr>
             </a:pPr>
             <a:r>
-              <a:t>结论：复杂度决定 AI 的应用边界</a:t>
-            </a:r>
-          </a:p>
-        </p:txBody>
-      </p:sp>
-      <p:sp>
-        <p:nvSpPr>
-          <p:cNvPr id="3" name="TextBox 2"/>
+              <a:t>结论：复杂度决定 AI 价值</a:t>
+            </a:r>
+          </a:p>
+        </p:txBody>
+      </p:sp>
+      <p:sp>
+        <p:nvSpPr>
+          <p:cNvPr id="4" name="TextBox 3"/>
           <p:cNvSpPr txBox="1"/>
           <p:nvPr/>
         </p:nvSpPr>
         <p:spPr>
           <a:xfrm>
-            <a:off x="457200" y="914400"/>
-            <a:ext cx="9144000" cy="457200"/>
+            <a:off x="548640" y="1005840"/>
+            <a:ext cx="7315200" cy="365760"/>
           </a:xfrm>
           <a:prstGeom prst="rect">
             <a:avLst/>
@@ -3155,7 +3192,509 @@
           <a:lstStyle/>
           <a:p>
             <a:pPr>
-              <a:defRPr sz="2000">
+              <a:defRPr sz="1600">
+                <a:solidFill>
+                  <a:srgbClr val="595959"/>
+                </a:solidFill>
+                <a:latin typeface="Microsoft YaHei"/>
+              </a:defRPr>
+            </a:pPr>
+            <a:r>
+              <a:t>SAP ABAP AI Coding 效率与质量总览</a:t>
+            </a:r>
+          </a:p>
+        </p:txBody>
+      </p:sp>
+      <p:sp>
+        <p:nvSpPr>
+          <p:cNvPr id="5" name="Rectangle 4"/>
+          <p:cNvSpPr/>
+          <p:nvPr/>
+        </p:nvSpPr>
+        <p:spPr>
+          <a:xfrm>
+            <a:off x="1371600" y="3017520"/>
+            <a:ext cx="9418320" cy="12700"/>
+          </a:xfrm>
+          <a:prstGeom prst="rect">
+            <a:avLst/>
+          </a:prstGeom>
+          <a:ln w="19050">
+            <a:solidFill>
+              <a:srgbClr val="0F2B5B"/>
+            </a:solidFill>
+          </a:ln>
+        </p:spPr>
+        <p:style>
+          <a:lnRef idx="1">
+            <a:schemeClr val="accent1"/>
+          </a:lnRef>
+          <a:fillRef idx="3">
+            <a:schemeClr val="accent1"/>
+          </a:fillRef>
+          <a:effectRef idx="2">
+            <a:schemeClr val="accent1"/>
+          </a:effectRef>
+          <a:fontRef idx="minor">
+            <a:schemeClr val="lt1"/>
+          </a:fontRef>
+        </p:style>
+        <p:txBody>
+          <a:bodyPr rtlCol="0" anchor="ctr"/>
+          <a:lstStyle/>
+          <a:p>
+            <a:pPr algn="ctr"/>
+          </a:p>
+        </p:txBody>
+      </p:sp>
+      <p:sp>
+        <p:nvSpPr>
+          <p:cNvPr id="6" name="Isosceles Triangle 5"/>
+          <p:cNvSpPr/>
+          <p:nvPr/>
+        </p:nvSpPr>
+        <p:spPr>
+          <a:xfrm rot="16200000">
+            <a:off x="1325880" y="2971800"/>
+            <a:ext cx="91440" cy="91440"/>
+          </a:xfrm>
+          <a:prstGeom prst="triangle">
+            <a:avLst/>
+          </a:prstGeom>
+          <a:solidFill>
+            <a:srgbClr val="0F2B5B"/>
+          </a:solidFill>
+          <a:ln>
+            <a:noFill/>
+          </a:ln>
+        </p:spPr>
+        <p:style>
+          <a:lnRef idx="1">
+            <a:schemeClr val="accent1"/>
+          </a:lnRef>
+          <a:fillRef idx="3">
+            <a:schemeClr val="accent1"/>
+          </a:fillRef>
+          <a:effectRef idx="2">
+            <a:schemeClr val="accent1"/>
+          </a:effectRef>
+          <a:fontRef idx="minor">
+            <a:schemeClr val="lt1"/>
+          </a:fontRef>
+        </p:style>
+        <p:txBody>
+          <a:bodyPr rtlCol="0" anchor="ctr"/>
+          <a:lstStyle/>
+          <a:p>
+            <a:pPr algn="ctr"/>
+          </a:p>
+        </p:txBody>
+      </p:sp>
+      <p:sp>
+        <p:nvSpPr>
+          <p:cNvPr id="7" name="Isosceles Triangle 6"/>
+          <p:cNvSpPr/>
+          <p:nvPr/>
+        </p:nvSpPr>
+        <p:spPr>
+          <a:xfrm rot="5400000">
+            <a:off x="10744200" y="2971800"/>
+            <a:ext cx="91440" cy="91440"/>
+          </a:xfrm>
+          <a:prstGeom prst="triangle">
+            <a:avLst/>
+          </a:prstGeom>
+          <a:solidFill>
+            <a:srgbClr val="0F2B5B"/>
+          </a:solidFill>
+          <a:ln>
+            <a:noFill/>
+          </a:ln>
+        </p:spPr>
+        <p:style>
+          <a:lnRef idx="1">
+            <a:schemeClr val="accent1"/>
+          </a:lnRef>
+          <a:fillRef idx="3">
+            <a:schemeClr val="accent1"/>
+          </a:fillRef>
+          <a:effectRef idx="2">
+            <a:schemeClr val="accent1"/>
+          </a:effectRef>
+          <a:fontRef idx="minor">
+            <a:schemeClr val="lt1"/>
+          </a:fontRef>
+        </p:style>
+        <p:txBody>
+          <a:bodyPr rtlCol="0" anchor="ctr"/>
+          <a:lstStyle/>
+          <a:p>
+            <a:pPr algn="ctr"/>
+          </a:p>
+        </p:txBody>
+      </p:sp>
+      <p:sp>
+        <p:nvSpPr>
+          <p:cNvPr id="8" name="Rectangle 7"/>
+          <p:cNvSpPr/>
+          <p:nvPr/>
+        </p:nvSpPr>
+        <p:spPr>
+          <a:xfrm>
+            <a:off x="6089904" y="1645920"/>
+            <a:ext cx="12700" cy="2743200"/>
+          </a:xfrm>
+          <a:prstGeom prst="rect">
+            <a:avLst/>
+          </a:prstGeom>
+          <a:ln w="19050">
+            <a:solidFill>
+              <a:srgbClr val="0F2B5B"/>
+            </a:solidFill>
+          </a:ln>
+        </p:spPr>
+        <p:style>
+          <a:lnRef idx="1">
+            <a:schemeClr val="accent1"/>
+          </a:lnRef>
+          <a:fillRef idx="3">
+            <a:schemeClr val="accent1"/>
+          </a:fillRef>
+          <a:effectRef idx="2">
+            <a:schemeClr val="accent1"/>
+          </a:effectRef>
+          <a:fontRef idx="minor">
+            <a:schemeClr val="lt1"/>
+          </a:fontRef>
+        </p:style>
+        <p:txBody>
+          <a:bodyPr rtlCol="0" anchor="ctr"/>
+          <a:lstStyle/>
+          <a:p>
+            <a:pPr algn="ctr"/>
+          </a:p>
+        </p:txBody>
+      </p:sp>
+      <p:sp>
+        <p:nvSpPr>
+          <p:cNvPr id="9" name="Isosceles Triangle 8"/>
+          <p:cNvSpPr/>
+          <p:nvPr/>
+        </p:nvSpPr>
+        <p:spPr>
+          <a:xfrm>
+            <a:off x="6044184" y="1600200"/>
+            <a:ext cx="91440" cy="91440"/>
+          </a:xfrm>
+          <a:prstGeom prst="triangle">
+            <a:avLst/>
+          </a:prstGeom>
+          <a:solidFill>
+            <a:srgbClr val="0F2B5B"/>
+          </a:solidFill>
+          <a:ln>
+            <a:noFill/>
+          </a:ln>
+        </p:spPr>
+        <p:style>
+          <a:lnRef idx="1">
+            <a:schemeClr val="accent1"/>
+          </a:lnRef>
+          <a:fillRef idx="3">
+            <a:schemeClr val="accent1"/>
+          </a:fillRef>
+          <a:effectRef idx="2">
+            <a:schemeClr val="accent1"/>
+          </a:effectRef>
+          <a:fontRef idx="minor">
+            <a:schemeClr val="lt1"/>
+          </a:fontRef>
+        </p:style>
+        <p:txBody>
+          <a:bodyPr rtlCol="0" anchor="ctr"/>
+          <a:lstStyle/>
+          <a:p>
+            <a:pPr algn="ctr"/>
+          </a:p>
+        </p:txBody>
+      </p:sp>
+      <p:sp>
+        <p:nvSpPr>
+          <p:cNvPr id="10" name="Isosceles Triangle 9"/>
+          <p:cNvSpPr/>
+          <p:nvPr/>
+        </p:nvSpPr>
+        <p:spPr>
+          <a:xfrm rot="10800000">
+            <a:off x="6044184" y="4343400"/>
+            <a:ext cx="91440" cy="91440"/>
+          </a:xfrm>
+          <a:prstGeom prst="triangle">
+            <a:avLst/>
+          </a:prstGeom>
+          <a:solidFill>
+            <a:srgbClr val="0F2B5B"/>
+          </a:solidFill>
+          <a:ln>
+            <a:noFill/>
+          </a:ln>
+        </p:spPr>
+        <p:style>
+          <a:lnRef idx="1">
+            <a:schemeClr val="accent1"/>
+          </a:lnRef>
+          <a:fillRef idx="3">
+            <a:schemeClr val="accent1"/>
+          </a:fillRef>
+          <a:effectRef idx="2">
+            <a:schemeClr val="accent1"/>
+          </a:effectRef>
+          <a:fontRef idx="minor">
+            <a:schemeClr val="lt1"/>
+          </a:fontRef>
+        </p:style>
+        <p:txBody>
+          <a:bodyPr rtlCol="0" anchor="ctr"/>
+          <a:lstStyle/>
+          <a:p>
+            <a:pPr algn="ctr"/>
+          </a:p>
+        </p:txBody>
+      </p:sp>
+      <p:sp>
+        <p:nvSpPr>
+          <p:cNvPr id="11" name="Oval 10"/>
+          <p:cNvSpPr/>
+          <p:nvPr/>
+        </p:nvSpPr>
+        <p:spPr>
+          <a:xfrm>
+            <a:off x="5998464" y="2926079"/>
+            <a:ext cx="182880" cy="182880"/>
+          </a:xfrm>
+          <a:prstGeom prst="ellipse">
+            <a:avLst/>
+          </a:prstGeom>
+          <a:solidFill>
+            <a:srgbClr val="F8F9FA"/>
+          </a:solidFill>
+          <a:ln w="19050">
+            <a:solidFill>
+              <a:srgbClr val="0F2B5B"/>
+            </a:solidFill>
+          </a:ln>
+        </p:spPr>
+        <p:style>
+          <a:lnRef idx="1">
+            <a:schemeClr val="accent1"/>
+          </a:lnRef>
+          <a:fillRef idx="3">
+            <a:schemeClr val="accent1"/>
+          </a:fillRef>
+          <a:effectRef idx="2">
+            <a:schemeClr val="accent1"/>
+          </a:effectRef>
+          <a:fontRef idx="minor">
+            <a:schemeClr val="lt1"/>
+          </a:fontRef>
+        </p:style>
+        <p:txBody>
+          <a:bodyPr rtlCol="0" anchor="ctr"/>
+          <a:lstStyle/>
+          <a:p>
+            <a:pPr algn="ctr"/>
+          </a:p>
+        </p:txBody>
+      </p:sp>
+      <p:sp>
+        <p:nvSpPr>
+          <p:cNvPr id="12" name="TextBox 11"/>
+          <p:cNvSpPr txBox="1"/>
+          <p:nvPr/>
+        </p:nvSpPr>
+        <p:spPr>
+          <a:xfrm>
+            <a:off x="457200" y="2743200"/>
+            <a:ext cx="822960" cy="548640"/>
+          </a:xfrm>
+          <a:prstGeom prst="rect">
+            <a:avLst/>
+          </a:prstGeom>
+          <a:noFill/>
+        </p:spPr>
+        <p:txBody>
+          <a:bodyPr wrap="square">
+            <a:spAutoFit/>
+          </a:bodyPr>
+          <a:lstStyle/>
+          <a:p>
+            <a:pPr algn="r">
+              <a:defRPr sz="1200">
+                <a:latin typeface="Microsoft YaHei"/>
+              </a:defRPr>
+            </a:pPr>
+            <a:r>
+              <a:t>任务度</a:t>
+            </a:r>
+            <a:br/>
+            <a:r>
+              <a:t>Simple 简单</a:t>
+            </a:r>
+          </a:p>
+        </p:txBody>
+      </p:sp>
+      <p:sp>
+        <p:nvSpPr>
+          <p:cNvPr id="13" name="TextBox 12"/>
+          <p:cNvSpPr txBox="1"/>
+          <p:nvPr/>
+        </p:nvSpPr>
+        <p:spPr>
+          <a:xfrm>
+            <a:off x="10881360" y="2743200"/>
+            <a:ext cx="1097280" cy="548640"/>
+          </a:xfrm>
+          <a:prstGeom prst="rect">
+            <a:avLst/>
+          </a:prstGeom>
+          <a:noFill/>
+        </p:spPr>
+        <p:txBody>
+          <a:bodyPr wrap="square">
+            <a:spAutoFit/>
+          </a:bodyPr>
+          <a:lstStyle/>
+          <a:p>
+            <a:pPr algn="l">
+              <a:defRPr sz="1200">
+                <a:latin typeface="Microsoft YaHei"/>
+              </a:defRPr>
+            </a:pPr>
+            <a:r>
+              <a:t>复杂度</a:t>
+            </a:r>
+            <a:br/>
+            <a:r>
+              <a:t>Complex 复杂</a:t>
+            </a:r>
+          </a:p>
+        </p:txBody>
+      </p:sp>
+      <p:sp>
+        <p:nvSpPr>
+          <p:cNvPr id="14" name="TextBox 13"/>
+          <p:cNvSpPr txBox="1"/>
+          <p:nvPr/>
+        </p:nvSpPr>
+        <p:spPr>
+          <a:xfrm>
+            <a:off x="5175504" y="1188720"/>
+            <a:ext cx="1828800" cy="548640"/>
+          </a:xfrm>
+          <a:prstGeom prst="rect">
+            <a:avLst/>
+          </a:prstGeom>
+          <a:noFill/>
+        </p:spPr>
+        <p:txBody>
+          <a:bodyPr wrap="square">
+            <a:spAutoFit/>
+          </a:bodyPr>
+          <a:lstStyle/>
+          <a:p>
+            <a:pPr algn="ctr">
+              <a:defRPr sz="1200">
+                <a:latin typeface="Microsoft YaHei"/>
+              </a:defRPr>
+            </a:pPr>
+            <a:r>
+              <a:t>效率影响</a:t>
+            </a:r>
+            <a:br/>
+            <a:r>
+              <a:t>Positive 正面</a:t>
+            </a:r>
+          </a:p>
+        </p:txBody>
+      </p:sp>
+      <p:sp>
+        <p:nvSpPr>
+          <p:cNvPr id="15" name="TextBox 14"/>
+          <p:cNvSpPr txBox="1"/>
+          <p:nvPr/>
+        </p:nvSpPr>
+        <p:spPr>
+          <a:xfrm>
+            <a:off x="5175504" y="4480560"/>
+            <a:ext cx="1828800" cy="548640"/>
+          </a:xfrm>
+          <a:prstGeom prst="rect">
+            <a:avLst/>
+          </a:prstGeom>
+          <a:noFill/>
+        </p:spPr>
+        <p:txBody>
+          <a:bodyPr wrap="square">
+            <a:spAutoFit/>
+          </a:bodyPr>
+          <a:lstStyle/>
+          <a:p>
+            <a:pPr algn="ctr">
+              <a:defRPr sz="1200">
+                <a:latin typeface="Microsoft YaHei"/>
+              </a:defRPr>
+            </a:pPr>
+            <a:r>
+              <a:t>Negative 负面</a:t>
+            </a:r>
+            <a:br/>
+            <a:r>
+              <a:t>效率影响</a:t>
+            </a:r>
+          </a:p>
+        </p:txBody>
+      </p:sp>
+      <p:sp>
+        <p:nvSpPr>
+          <p:cNvPr id="16" name="Oval 15"/>
+          <p:cNvSpPr/>
+          <p:nvPr/>
+        </p:nvSpPr>
+        <p:spPr>
+          <a:xfrm>
+            <a:off x="2651760" y="1874520"/>
+            <a:ext cx="320040" cy="320040"/>
+          </a:xfrm>
+          <a:prstGeom prst="ellipse">
+            <a:avLst/>
+          </a:prstGeom>
+          <a:solidFill>
+            <a:srgbClr val="2E9E66"/>
+          </a:solidFill>
+          <a:ln>
+            <a:noFill/>
+          </a:ln>
+        </p:spPr>
+        <p:style>
+          <a:lnRef idx="1">
+            <a:schemeClr val="accent1"/>
+          </a:lnRef>
+          <a:fillRef idx="3">
+            <a:schemeClr val="accent1"/>
+          </a:fillRef>
+          <a:effectRef idx="2">
+            <a:schemeClr val="accent1"/>
+          </a:effectRef>
+          <a:fontRef idx="minor">
+            <a:schemeClr val="lt1"/>
+          </a:fontRef>
+        </p:style>
+        <p:txBody>
+          <a:bodyPr rtlCol="0" anchor="ctr" lIns="0" rIns="0" tIns="0" bIns="0"/>
+          <a:lstStyle/>
+          <a:p>
+            <a:pPr algn="ctr">
+              <a:defRPr sz="1600" b="1">
                 <a:solidFill>
                   <a:srgbClr val="FFFFFF"/>
                 </a:solidFill>
@@ -3163,21 +3702,842 @@
               </a:defRPr>
             </a:pPr>
             <a:r>
-              <a:t>SAP ABAP AI Coding 效能总览</a:t>
-            </a:r>
-          </a:p>
-        </p:txBody>
-      </p:sp>
-      <p:sp>
-        <p:nvSpPr>
-          <p:cNvPr id="4" name="Rounded Rectangle 3"/>
+              <a:t>↑</a:t>
+            </a:r>
+          </a:p>
+        </p:txBody>
+      </p:sp>
+      <p:sp>
+        <p:nvSpPr>
+          <p:cNvPr id="17" name="TextBox 16"/>
+          <p:cNvSpPr txBox="1"/>
+          <p:nvPr/>
+        </p:nvSpPr>
+        <p:spPr>
+          <a:xfrm>
+            <a:off x="3017520" y="1828800"/>
+            <a:ext cx="2286000" cy="914400"/>
+          </a:xfrm>
+          <a:prstGeom prst="rect">
+            <a:avLst/>
+          </a:prstGeom>
+          <a:noFill/>
+        </p:spPr>
+        <p:txBody>
+          <a:bodyPr wrap="square">
+            <a:spAutoFit/>
+          </a:bodyPr>
+          <a:lstStyle/>
+          <a:p>
+            <a:pPr>
+              <a:defRPr sz="2000" b="1">
+                <a:solidFill>
+                  <a:srgbClr val="2E9E66"/>
+                </a:solidFill>
+                <a:latin typeface="Microsoft YaHei"/>
+              </a:defRPr>
+            </a:pPr>
+            <a:r>
+              <a:t>+50% 提效</a:t>
+            </a:r>
+          </a:p>
+          <a:p>
+            <a:pPr>
+              <a:spcBef>
+                <a:spcPts val="500"/>
+              </a:spcBef>
+              <a:defRPr sz="1400" b="1">
+                <a:solidFill>
+                  <a:srgbClr val="000000"/>
+                </a:solidFill>
+                <a:latin typeface="Microsoft YaHei"/>
+              </a:defRPr>
+            </a:pPr>
+            <a:r>
+              <a:t> 简单场景</a:t>
+            </a:r>
+          </a:p>
+          <a:p>
+            <a:pPr>
+              <a:defRPr sz="1200">
+                <a:solidFill>
+                  <a:srgbClr val="595959"/>
+                </a:solidFill>
+                <a:latin typeface="Microsoft YaHei"/>
+              </a:defRPr>
+            </a:pPr>
+            <a:r>
+              <a:t>快速生成工具代码</a:t>
+            </a:r>
+          </a:p>
+        </p:txBody>
+      </p:sp>
+      <p:sp>
+        <p:nvSpPr>
+          <p:cNvPr id="18" name="Oval 17"/>
           <p:cNvSpPr/>
           <p:nvPr/>
         </p:nvSpPr>
         <p:spPr>
           <a:xfrm>
-            <a:off x="548640" y="1554480"/>
-            <a:ext cx="5943600" cy="5029200"/>
+            <a:off x="6217920" y="2148840"/>
+            <a:ext cx="320040" cy="320040"/>
+          </a:xfrm>
+          <a:prstGeom prst="ellipse">
+            <a:avLst/>
+          </a:prstGeom>
+          <a:solidFill>
+            <a:srgbClr val="7C8A9C"/>
+          </a:solidFill>
+          <a:ln>
+            <a:noFill/>
+          </a:ln>
+        </p:spPr>
+        <p:style>
+          <a:lnRef idx="1">
+            <a:schemeClr val="accent1"/>
+          </a:lnRef>
+          <a:fillRef idx="3">
+            <a:schemeClr val="accent1"/>
+          </a:fillRef>
+          <a:effectRef idx="2">
+            <a:schemeClr val="accent1"/>
+          </a:effectRef>
+          <a:fontRef idx="minor">
+            <a:schemeClr val="lt1"/>
+          </a:fontRef>
+        </p:style>
+        <p:txBody>
+          <a:bodyPr rtlCol="0" anchor="ctr" lIns="0" rIns="0" tIns="0" bIns="0"/>
+          <a:lstStyle/>
+          <a:p>
+            <a:pPr algn="ctr">
+              <a:defRPr sz="1600" b="1">
+                <a:solidFill>
+                  <a:srgbClr val="FFFFFF"/>
+                </a:solidFill>
+                <a:latin typeface="Microsoft YaHei"/>
+              </a:defRPr>
+            </a:pPr>
+            <a:r>
+              <a:t>→</a:t>
+            </a:r>
+          </a:p>
+        </p:txBody>
+      </p:sp>
+      <p:sp>
+        <p:nvSpPr>
+          <p:cNvPr id="19" name="TextBox 18"/>
+          <p:cNvSpPr txBox="1"/>
+          <p:nvPr/>
+        </p:nvSpPr>
+        <p:spPr>
+          <a:xfrm>
+            <a:off x="6583680" y="2103120"/>
+            <a:ext cx="2286000" cy="914400"/>
+          </a:xfrm>
+          <a:prstGeom prst="rect">
+            <a:avLst/>
+          </a:prstGeom>
+          <a:noFill/>
+        </p:spPr>
+        <p:txBody>
+          <a:bodyPr wrap="square">
+            <a:spAutoFit/>
+          </a:bodyPr>
+          <a:lstStyle/>
+          <a:p>
+            <a:pPr>
+              <a:defRPr sz="2000" b="1">
+                <a:solidFill>
+                  <a:srgbClr val="7C8A9C"/>
+                </a:solidFill>
+                <a:latin typeface="Microsoft YaHei"/>
+              </a:defRPr>
+            </a:pPr>
+            <a:r>
+              <a:t>~0% 持平</a:t>
+            </a:r>
+          </a:p>
+          <a:p>
+            <a:pPr>
+              <a:spcBef>
+                <a:spcPts val="500"/>
+              </a:spcBef>
+              <a:defRPr sz="1400" b="1">
+                <a:solidFill>
+                  <a:srgbClr val="000000"/>
+                </a:solidFill>
+                <a:latin typeface="Microsoft YaHei"/>
+              </a:defRPr>
+            </a:pPr>
+            <a:r>
+              <a:t> 中等场景</a:t>
+            </a:r>
+          </a:p>
+          <a:p>
+            <a:pPr>
+              <a:defRPr sz="1200">
+                <a:solidFill>
+                  <a:srgbClr val="595959"/>
+                </a:solidFill>
+                <a:latin typeface="Microsoft YaHei"/>
+              </a:defRPr>
+            </a:pPr>
+            <a:r>
+              <a:t>需人工修正逻辑</a:t>
+            </a:r>
+          </a:p>
+        </p:txBody>
+      </p:sp>
+      <p:sp>
+        <p:nvSpPr>
+          <p:cNvPr id="20" name="Oval 19"/>
+          <p:cNvSpPr/>
+          <p:nvPr/>
+        </p:nvSpPr>
+        <p:spPr>
+          <a:xfrm>
+            <a:off x="7772400" y="3337560"/>
+            <a:ext cx="320040" cy="320040"/>
+          </a:xfrm>
+          <a:prstGeom prst="ellipse">
+            <a:avLst/>
+          </a:prstGeom>
+          <a:solidFill>
+            <a:srgbClr val="D9534F"/>
+          </a:solidFill>
+          <a:ln>
+            <a:noFill/>
+          </a:ln>
+        </p:spPr>
+        <p:style>
+          <a:lnRef idx="1">
+            <a:schemeClr val="accent1"/>
+          </a:lnRef>
+          <a:fillRef idx="3">
+            <a:schemeClr val="accent1"/>
+          </a:fillRef>
+          <a:effectRef idx="2">
+            <a:schemeClr val="accent1"/>
+          </a:effectRef>
+          <a:fontRef idx="minor">
+            <a:schemeClr val="lt1"/>
+          </a:fontRef>
+        </p:style>
+        <p:txBody>
+          <a:bodyPr rtlCol="0" anchor="ctr" lIns="0" rIns="0" tIns="0" bIns="0"/>
+          <a:lstStyle/>
+          <a:p>
+            <a:pPr algn="ctr">
+              <a:defRPr sz="1600" b="1">
+                <a:solidFill>
+                  <a:srgbClr val="FFFFFF"/>
+                </a:solidFill>
+                <a:latin typeface="Microsoft YaHei"/>
+              </a:defRPr>
+            </a:pPr>
+            <a:r>
+              <a:t>↓</a:t>
+            </a:r>
+          </a:p>
+        </p:txBody>
+      </p:sp>
+      <p:sp>
+        <p:nvSpPr>
+          <p:cNvPr id="21" name="TextBox 20"/>
+          <p:cNvSpPr txBox="1"/>
+          <p:nvPr/>
+        </p:nvSpPr>
+        <p:spPr>
+          <a:xfrm>
+            <a:off x="8138160" y="3291840"/>
+            <a:ext cx="2286000" cy="914400"/>
+          </a:xfrm>
+          <a:prstGeom prst="rect">
+            <a:avLst/>
+          </a:prstGeom>
+          <a:noFill/>
+        </p:spPr>
+        <p:txBody>
+          <a:bodyPr wrap="square">
+            <a:spAutoFit/>
+          </a:bodyPr>
+          <a:lstStyle/>
+          <a:p>
+            <a:pPr>
+              <a:defRPr sz="2000" b="1">
+                <a:solidFill>
+                  <a:srgbClr val="D9534F"/>
+                </a:solidFill>
+                <a:latin typeface="Microsoft YaHei"/>
+              </a:defRPr>
+            </a:pPr>
+            <a:r>
+              <a:t>-60% 效率反降</a:t>
+            </a:r>
+          </a:p>
+          <a:p>
+            <a:pPr>
+              <a:spcBef>
+                <a:spcPts val="500"/>
+              </a:spcBef>
+              <a:defRPr sz="1400" b="1">
+                <a:solidFill>
+                  <a:srgbClr val="000000"/>
+                </a:solidFill>
+                <a:latin typeface="Microsoft YaHei"/>
+              </a:defRPr>
+            </a:pPr>
+            <a:r>
+              <a:t> 复杂场景</a:t>
+            </a:r>
+          </a:p>
+          <a:p>
+            <a:pPr>
+              <a:defRPr sz="1200">
+                <a:solidFill>
+                  <a:srgbClr val="595959"/>
+                </a:solidFill>
+                <a:latin typeface="Microsoft YaHei"/>
+              </a:defRPr>
+            </a:pPr>
+            <a:r>
+              <a:t>频繁幻觉与重构</a:t>
+            </a:r>
+          </a:p>
+        </p:txBody>
+      </p:sp>
+      <p:sp>
+        <p:nvSpPr>
+          <p:cNvPr id="22" name="TextBox 21"/>
+          <p:cNvSpPr txBox="1"/>
+          <p:nvPr/>
+        </p:nvSpPr>
+        <p:spPr>
+          <a:xfrm>
+            <a:off x="548640" y="4389120"/>
+            <a:ext cx="2743200" cy="365760"/>
+          </a:xfrm>
+          <a:prstGeom prst="rect">
+            <a:avLst/>
+          </a:prstGeom>
+          <a:noFill/>
+        </p:spPr>
+        <p:txBody>
+          <a:bodyPr wrap="none">
+            <a:spAutoFit/>
+          </a:bodyPr>
+          <a:lstStyle/>
+          <a:p>
+            <a:pPr>
+              <a:defRPr sz="1600" b="1">
+                <a:solidFill>
+                  <a:srgbClr val="000000"/>
+                </a:solidFill>
+                <a:latin typeface="Microsoft YaHei"/>
+              </a:defRPr>
+            </a:pPr>
+            <a:r>
+              <a:t>核心洞察与评价</a:t>
+            </a:r>
+          </a:p>
+        </p:txBody>
+      </p:sp>
+      <p:sp>
+        <p:nvSpPr>
+          <p:cNvPr id="23" name="Rectangle 22"/>
+          <p:cNvSpPr/>
+          <p:nvPr/>
+        </p:nvSpPr>
+        <p:spPr>
+          <a:xfrm>
+            <a:off x="822960" y="4937760"/>
+            <a:ext cx="731520" cy="548640"/>
+          </a:xfrm>
+          <a:prstGeom prst="rect">
+            <a:avLst/>
+          </a:prstGeom>
+          <a:noFill/>
+          <a:ln w="19050">
+            <a:solidFill>
+              <a:srgbClr val="000000"/>
+            </a:solidFill>
+          </a:ln>
+        </p:spPr>
+        <p:style>
+          <a:lnRef idx="1">
+            <a:schemeClr val="accent1"/>
+          </a:lnRef>
+          <a:fillRef idx="3">
+            <a:schemeClr val="accent1"/>
+          </a:fillRef>
+          <a:effectRef idx="2">
+            <a:schemeClr val="accent1"/>
+          </a:effectRef>
+          <a:fontRef idx="minor">
+            <a:schemeClr val="lt1"/>
+          </a:fontRef>
+        </p:style>
+        <p:txBody>
+          <a:bodyPr rtlCol="0" anchor="ctr"/>
+          <a:lstStyle/>
+          <a:p>
+            <a:pPr algn="ctr"/>
+          </a:p>
+        </p:txBody>
+      </p:sp>
+      <p:sp>
+        <p:nvSpPr>
+          <p:cNvPr id="24" name="Rectangle 23"/>
+          <p:cNvSpPr/>
+          <p:nvPr/>
+        </p:nvSpPr>
+        <p:spPr>
+          <a:xfrm>
+            <a:off x="914400" y="5029200"/>
+            <a:ext cx="182880" cy="91440"/>
+          </a:xfrm>
+          <a:prstGeom prst="rect">
+            <a:avLst/>
+          </a:prstGeom>
+          <a:ln w="19050">
+            <a:solidFill>
+              <a:srgbClr val="000000"/>
+            </a:solidFill>
+          </a:ln>
+        </p:spPr>
+        <p:style>
+          <a:lnRef idx="1">
+            <a:schemeClr val="accent1"/>
+          </a:lnRef>
+          <a:fillRef idx="3">
+            <a:schemeClr val="accent1"/>
+          </a:fillRef>
+          <a:effectRef idx="2">
+            <a:schemeClr val="accent1"/>
+          </a:effectRef>
+          <a:fontRef idx="minor">
+            <a:schemeClr val="lt1"/>
+          </a:fontRef>
+        </p:style>
+        <p:txBody>
+          <a:bodyPr rtlCol="0" anchor="ctr"/>
+          <a:lstStyle/>
+          <a:p>
+            <a:pPr algn="ctr"/>
+          </a:p>
+        </p:txBody>
+      </p:sp>
+      <p:sp>
+        <p:nvSpPr>
+          <p:cNvPr id="25" name="Rectangle 24"/>
+          <p:cNvSpPr/>
+          <p:nvPr/>
+        </p:nvSpPr>
+        <p:spPr>
+          <a:xfrm>
+            <a:off x="1097280" y="5120640"/>
+            <a:ext cx="182880" cy="182880"/>
+          </a:xfrm>
+          <a:prstGeom prst="rect">
+            <a:avLst/>
+          </a:prstGeom>
+          <a:ln w="19050">
+            <a:solidFill>
+              <a:srgbClr val="000000"/>
+            </a:solidFill>
+          </a:ln>
+        </p:spPr>
+        <p:style>
+          <a:lnRef idx="1">
+            <a:schemeClr val="accent1"/>
+          </a:lnRef>
+          <a:fillRef idx="3">
+            <a:schemeClr val="accent1"/>
+          </a:fillRef>
+          <a:effectRef idx="2">
+            <a:schemeClr val="accent1"/>
+          </a:effectRef>
+          <a:fontRef idx="minor">
+            <a:schemeClr val="lt1"/>
+          </a:fontRef>
+        </p:style>
+        <p:txBody>
+          <a:bodyPr rtlCol="0" anchor="ctr"/>
+          <a:lstStyle/>
+          <a:p>
+            <a:pPr algn="ctr"/>
+          </a:p>
+        </p:txBody>
+      </p:sp>
+      <p:sp>
+        <p:nvSpPr>
+          <p:cNvPr id="26" name="Rectangle 25"/>
+          <p:cNvSpPr/>
+          <p:nvPr/>
+        </p:nvSpPr>
+        <p:spPr>
+          <a:xfrm>
+            <a:off x="1280160" y="5303520"/>
+            <a:ext cx="182880" cy="91440"/>
+          </a:xfrm>
+          <a:prstGeom prst="rect">
+            <a:avLst/>
+          </a:prstGeom>
+          <a:ln w="19050">
+            <a:solidFill>
+              <a:srgbClr val="000000"/>
+            </a:solidFill>
+          </a:ln>
+        </p:spPr>
+        <p:style>
+          <a:lnRef idx="1">
+            <a:schemeClr val="accent1"/>
+          </a:lnRef>
+          <a:fillRef idx="3">
+            <a:schemeClr val="accent1"/>
+          </a:fillRef>
+          <a:effectRef idx="2">
+            <a:schemeClr val="accent1"/>
+          </a:effectRef>
+          <a:fontRef idx="minor">
+            <a:schemeClr val="lt1"/>
+          </a:fontRef>
+        </p:style>
+        <p:txBody>
+          <a:bodyPr rtlCol="0" anchor="ctr"/>
+          <a:lstStyle/>
+          <a:p>
+            <a:pPr algn="ctr"/>
+          </a:p>
+        </p:txBody>
+      </p:sp>
+      <p:sp>
+        <p:nvSpPr>
+          <p:cNvPr id="27" name="Oval 26"/>
+          <p:cNvSpPr/>
+          <p:nvPr/>
+        </p:nvSpPr>
+        <p:spPr>
+          <a:xfrm>
+            <a:off x="868680" y="4983480"/>
+            <a:ext cx="91440" cy="91440"/>
+          </a:xfrm>
+          <a:prstGeom prst="ellipse">
+            <a:avLst/>
+          </a:prstGeom>
+          <a:solidFill>
+            <a:srgbClr val="FFFFFF"/>
+          </a:solidFill>
+          <a:ln w="19050">
+            <a:solidFill>
+              <a:srgbClr val="000000"/>
+            </a:solidFill>
+          </a:ln>
+        </p:spPr>
+        <p:style>
+          <a:lnRef idx="1">
+            <a:schemeClr val="accent1"/>
+          </a:lnRef>
+          <a:fillRef idx="3">
+            <a:schemeClr val="accent1"/>
+          </a:fillRef>
+          <a:effectRef idx="2">
+            <a:schemeClr val="accent1"/>
+          </a:effectRef>
+          <a:fontRef idx="minor">
+            <a:schemeClr val="lt1"/>
+          </a:fontRef>
+        </p:style>
+        <p:txBody>
+          <a:bodyPr rtlCol="0" anchor="ctr"/>
+          <a:lstStyle/>
+          <a:p>
+            <a:pPr algn="ctr"/>
+          </a:p>
+        </p:txBody>
+      </p:sp>
+      <p:sp>
+        <p:nvSpPr>
+          <p:cNvPr id="28" name="Oval 27"/>
+          <p:cNvSpPr/>
+          <p:nvPr/>
+        </p:nvSpPr>
+        <p:spPr>
+          <a:xfrm>
+            <a:off x="1051560" y="5074920"/>
+            <a:ext cx="91440" cy="91440"/>
+          </a:xfrm>
+          <a:prstGeom prst="ellipse">
+            <a:avLst/>
+          </a:prstGeom>
+          <a:solidFill>
+            <a:srgbClr val="FFFFFF"/>
+          </a:solidFill>
+          <a:ln w="19050">
+            <a:solidFill>
+              <a:srgbClr val="000000"/>
+            </a:solidFill>
+          </a:ln>
+        </p:spPr>
+        <p:style>
+          <a:lnRef idx="1">
+            <a:schemeClr val="accent1"/>
+          </a:lnRef>
+          <a:fillRef idx="3">
+            <a:schemeClr val="accent1"/>
+          </a:fillRef>
+          <a:effectRef idx="2">
+            <a:schemeClr val="accent1"/>
+          </a:effectRef>
+          <a:fontRef idx="minor">
+            <a:schemeClr val="lt1"/>
+          </a:fontRef>
+        </p:style>
+        <p:txBody>
+          <a:bodyPr rtlCol="0" anchor="ctr"/>
+          <a:lstStyle/>
+          <a:p>
+            <a:pPr algn="ctr"/>
+          </a:p>
+        </p:txBody>
+      </p:sp>
+      <p:sp>
+        <p:nvSpPr>
+          <p:cNvPr id="29" name="Oval 28"/>
+          <p:cNvSpPr/>
+          <p:nvPr/>
+        </p:nvSpPr>
+        <p:spPr>
+          <a:xfrm>
+            <a:off x="1234439" y="5257800"/>
+            <a:ext cx="91440" cy="91440"/>
+          </a:xfrm>
+          <a:prstGeom prst="ellipse">
+            <a:avLst/>
+          </a:prstGeom>
+          <a:solidFill>
+            <a:srgbClr val="FFFFFF"/>
+          </a:solidFill>
+          <a:ln w="19050">
+            <a:solidFill>
+              <a:srgbClr val="000000"/>
+            </a:solidFill>
+          </a:ln>
+        </p:spPr>
+        <p:style>
+          <a:lnRef idx="1">
+            <a:schemeClr val="accent1"/>
+          </a:lnRef>
+          <a:fillRef idx="3">
+            <a:schemeClr val="accent1"/>
+          </a:fillRef>
+          <a:effectRef idx="2">
+            <a:schemeClr val="accent1"/>
+          </a:effectRef>
+          <a:fontRef idx="minor">
+            <a:schemeClr val="lt1"/>
+          </a:fontRef>
+        </p:style>
+        <p:txBody>
+          <a:bodyPr rtlCol="0" anchor="ctr"/>
+          <a:lstStyle/>
+          <a:p>
+            <a:pPr algn="ctr"/>
+          </a:p>
+        </p:txBody>
+      </p:sp>
+      <p:sp>
+        <p:nvSpPr>
+          <p:cNvPr id="30" name="Oval 29"/>
+          <p:cNvSpPr/>
+          <p:nvPr/>
+        </p:nvSpPr>
+        <p:spPr>
+          <a:xfrm>
+            <a:off x="1417320" y="5349240"/>
+            <a:ext cx="91440" cy="91440"/>
+          </a:xfrm>
+          <a:prstGeom prst="ellipse">
+            <a:avLst/>
+          </a:prstGeom>
+          <a:solidFill>
+            <a:srgbClr val="FFFFFF"/>
+          </a:solidFill>
+          <a:ln w="19050">
+            <a:solidFill>
+              <a:srgbClr val="000000"/>
+            </a:solidFill>
+          </a:ln>
+        </p:spPr>
+        <p:style>
+          <a:lnRef idx="1">
+            <a:schemeClr val="accent1"/>
+          </a:lnRef>
+          <a:fillRef idx="3">
+            <a:schemeClr val="accent1"/>
+          </a:fillRef>
+          <a:effectRef idx="2">
+            <a:schemeClr val="accent1"/>
+          </a:effectRef>
+          <a:fontRef idx="minor">
+            <a:schemeClr val="lt1"/>
+          </a:fontRef>
+        </p:style>
+        <p:txBody>
+          <a:bodyPr rtlCol="0" anchor="ctr"/>
+          <a:lstStyle/>
+          <a:p>
+            <a:pPr algn="ctr"/>
+          </a:p>
+        </p:txBody>
+      </p:sp>
+      <p:sp>
+        <p:nvSpPr>
+          <p:cNvPr id="31" name="TextBox 30"/>
+          <p:cNvSpPr txBox="1"/>
+          <p:nvPr/>
+        </p:nvSpPr>
+        <p:spPr>
+          <a:xfrm>
+            <a:off x="1737360" y="4754880"/>
+            <a:ext cx="4389120" cy="1097280"/>
+          </a:xfrm>
+          <a:prstGeom prst="rect">
+            <a:avLst/>
+          </a:prstGeom>
+          <a:noFill/>
+        </p:spPr>
+        <p:txBody>
+          <a:bodyPr wrap="square">
+            <a:spAutoFit/>
+          </a:bodyPr>
+          <a:lstStyle/>
+          <a:p>
+            <a:pPr>
+              <a:defRPr sz="1300" b="1">
+                <a:latin typeface="Microsoft YaHei"/>
+              </a:defRPr>
+            </a:pPr>
+            <a:r>
+              <a:t>效率曲线与工具表现</a:t>
+            </a:r>
+          </a:p>
+          <a:p>
+            <a:pPr>
+              <a:spcBef>
+                <a:spcPts val="300"/>
+              </a:spcBef>
+              <a:defRPr sz="1100">
+                <a:latin typeface="Microsoft YaHei"/>
+              </a:defRPr>
+            </a:pPr>
+            <a:r>
+              <a:t> 效率趋势：简单场景提效50%，中等场景持平，复杂场景效率反降60%。</a:t>
+            </a:r>
+          </a:p>
+          <a:p>
+            <a:pPr>
+              <a:spcBef>
+                <a:spcPts val="300"/>
+              </a:spcBef>
+              <a:defRPr sz="1100">
+                <a:latin typeface="Microsoft YaHei"/>
+              </a:defRPr>
+            </a:pPr>
+            <a:r>
+              <a:t> 工具评价：Claude Code 在文档解析与逻辑框架上优于 Copilot，但均不精通 SAP 领域。  ，  Copilot</a:t>
+            </a:r>
+          </a:p>
+        </p:txBody>
+      </p:sp>
+      <p:sp>
+        <p:nvSpPr>
+          <p:cNvPr id="32" name="Isosceles Triangle 31"/>
+          <p:cNvSpPr/>
+          <p:nvPr/>
+        </p:nvSpPr>
+        <p:spPr>
+          <a:xfrm>
+            <a:off x="6400800" y="4846320"/>
+            <a:ext cx="457200" cy="411480"/>
+          </a:xfrm>
+          <a:prstGeom prst="triangle">
+            <a:avLst/>
+          </a:prstGeom>
+          <a:noFill/>
+          <a:ln w="19050">
+            <a:solidFill>
+              <a:srgbClr val="000000"/>
+            </a:solidFill>
+          </a:ln>
+        </p:spPr>
+        <p:style>
+          <a:lnRef idx="1">
+            <a:schemeClr val="accent1"/>
+          </a:lnRef>
+          <a:fillRef idx="3">
+            <a:schemeClr val="accent1"/>
+          </a:fillRef>
+          <a:effectRef idx="2">
+            <a:schemeClr val="accent1"/>
+          </a:effectRef>
+          <a:fontRef idx="minor">
+            <a:schemeClr val="lt1"/>
+          </a:fontRef>
+        </p:style>
+        <p:txBody>
+          <a:bodyPr rtlCol="0" anchor="ctr"/>
+          <a:lstStyle/>
+          <a:p>
+            <a:pPr algn="ctr"/>
+          </a:p>
+        </p:txBody>
+      </p:sp>
+      <p:sp>
+        <p:nvSpPr>
+          <p:cNvPr id="33" name="TextBox 32"/>
+          <p:cNvSpPr txBox="1"/>
+          <p:nvPr/>
+        </p:nvSpPr>
+        <p:spPr>
+          <a:xfrm>
+            <a:off x="6400800" y="4892040"/>
+            <a:ext cx="457200" cy="365760"/>
+          </a:xfrm>
+          <a:prstGeom prst="rect">
+            <a:avLst/>
+          </a:prstGeom>
+          <a:noFill/>
+        </p:spPr>
+        <p:txBody>
+          <a:bodyPr wrap="none">
+            <a:spAutoFit/>
+          </a:bodyPr>
+          <a:lstStyle/>
+          <a:p>
+            <a:pPr algn="ctr">
+              <a:defRPr sz="1600" b="1">
+                <a:latin typeface="Microsoft YaHei"/>
+              </a:defRPr>
+            </a:pPr>
+            <a:r>
+              <a:t>!</a:t>
+            </a:r>
+          </a:p>
+        </p:txBody>
+      </p:sp>
+      <p:sp>
+        <p:nvSpPr>
+          <p:cNvPr id="34" name="Rounded Rectangle 33"/>
+          <p:cNvSpPr/>
+          <p:nvPr/>
+        </p:nvSpPr>
+        <p:spPr>
+          <a:xfrm rot="2700000">
+            <a:off x="6446520" y="5394960"/>
+            <a:ext cx="228600" cy="137160"/>
           </a:xfrm>
           <a:prstGeom prst="roundRect">
             <a:avLst/>
@@ -3185,7 +4545,7 @@
           <a:noFill/>
           <a:ln w="19050">
             <a:solidFill>
-              <a:srgbClr val="FFDF8C"/>
+              <a:srgbClr val="000000"/>
             </a:solidFill>
           </a:ln>
         </p:spPr>
@@ -3213,1584 +4573,14 @@
       </p:sp>
       <p:sp>
         <p:nvSpPr>
-          <p:cNvPr id="5" name="Rounded Rectangle 4"/>
+          <p:cNvPr id="35" name="Rounded Rectangle 34"/>
           <p:cNvSpPr/>
           <p:nvPr/>
         </p:nvSpPr>
         <p:spPr>
-          <a:xfrm>
-            <a:off x="457200" y="1463040"/>
-            <a:ext cx="5943600" cy="5029200"/>
-          </a:xfrm>
-          <a:prstGeom prst="roundRect">
-            <a:avLst/>
-          </a:prstGeom>
-          <a:solidFill>
-            <a:srgbClr val="152842"/>
-          </a:solidFill>
-          <a:ln w="12700">
-            <a:solidFill>
-              <a:srgbClr val="3A5575"/>
-            </a:solidFill>
-          </a:ln>
-        </p:spPr>
-        <p:style>
-          <a:lnRef idx="1">
-            <a:schemeClr val="accent1"/>
-          </a:lnRef>
-          <a:fillRef idx="3">
-            <a:schemeClr val="accent1"/>
-          </a:fillRef>
-          <a:effectRef idx="2">
-            <a:schemeClr val="accent1"/>
-          </a:effectRef>
-          <a:fontRef idx="minor">
-            <a:schemeClr val="lt1"/>
-          </a:fontRef>
-        </p:style>
-        <p:txBody>
-          <a:bodyPr rtlCol="0" anchor="ctr"/>
-          <a:lstStyle/>
-          <a:p>
-            <a:pPr algn="ctr"/>
-          </a:p>
-        </p:txBody>
-      </p:sp>
-      <p:cxnSp>
-        <p:nvCxnSpPr>
-          <p:cNvPr id="6" name="Connector 5"/>
-          <p:cNvCxnSpPr/>
-          <p:nvPr/>
-        </p:nvCxnSpPr>
-        <p:spPr>
-          <a:xfrm flipV="1">
-            <a:off x="914400" y="1645920"/>
-            <a:ext cx="0" cy="4572000"/>
-          </a:xfrm>
-          <a:prstGeom prst="line">
-            <a:avLst/>
-          </a:prstGeom>
-          <a:ln w="25400">
-            <a:solidFill>
-              <a:srgbClr val="FFDF8C"/>
-            </a:solidFill>
-          </a:ln>
-        </p:spPr>
-        <p:style>
-          <a:lnRef idx="2">
-            <a:schemeClr val="accent1"/>
-          </a:lnRef>
-          <a:fillRef idx="0">
-            <a:schemeClr val="accent1"/>
-          </a:fillRef>
-          <a:effectRef idx="1">
-            <a:schemeClr val="accent1"/>
-          </a:effectRef>
-          <a:fontRef idx="minor">
-            <a:schemeClr val="tx1"/>
-          </a:fontRef>
-        </p:style>
-      </p:cxnSp>
-      <p:cxnSp>
-        <p:nvCxnSpPr>
-          <p:cNvPr id="7" name="Connector 6"/>
-          <p:cNvCxnSpPr/>
-          <p:nvPr/>
-        </p:nvCxnSpPr>
-        <p:spPr>
-          <a:xfrm>
-            <a:off x="914400" y="6217920"/>
-            <a:ext cx="5303520" cy="0"/>
-          </a:xfrm>
-          <a:prstGeom prst="line">
-            <a:avLst/>
-          </a:prstGeom>
-          <a:ln w="25400">
-            <a:solidFill>
-              <a:srgbClr val="FFDF8C"/>
-            </a:solidFill>
-          </a:ln>
-        </p:spPr>
-        <p:style>
-          <a:lnRef idx="2">
-            <a:schemeClr val="accent1"/>
-          </a:lnRef>
-          <a:fillRef idx="0">
-            <a:schemeClr val="accent1"/>
-          </a:fillRef>
-          <a:effectRef idx="1">
-            <a:schemeClr val="accent1"/>
-          </a:effectRef>
-          <a:fontRef idx="minor">
-            <a:schemeClr val="tx1"/>
-          </a:fontRef>
-        </p:style>
-      </p:cxnSp>
-      <p:sp>
-        <p:nvSpPr>
-          <p:cNvPr id="8" name="TextBox 7"/>
-          <p:cNvSpPr txBox="1"/>
-          <p:nvPr/>
-        </p:nvSpPr>
-        <p:spPr>
-          <a:xfrm rot="16200000">
-            <a:off x="182880" y="3657600"/>
-            <a:ext cx="1371600" cy="457200"/>
-          </a:xfrm>
-          <a:prstGeom prst="rect">
-            <a:avLst/>
-          </a:prstGeom>
-          <a:noFill/>
-        </p:spPr>
-        <p:txBody>
-          <a:bodyPr wrap="none">
-            <a:spAutoFit/>
-          </a:bodyPr>
-          <a:lstStyle/>
-          <a:p>
-            <a:pPr>
-              <a:defRPr sz="1400">
-                <a:solidFill>
-                  <a:srgbClr val="FFDF8C"/>
-                </a:solidFill>
-                <a:latin typeface="Microsoft YaHei"/>
-              </a:defRPr>
-            </a:pPr>
-            <a:r>
-              <a:t>提效百分比</a:t>
-            </a:r>
-          </a:p>
-        </p:txBody>
-      </p:sp>
-      <p:sp>
-        <p:nvSpPr>
-          <p:cNvPr id="9" name="TextBox 8"/>
-          <p:cNvSpPr txBox="1"/>
-          <p:nvPr/>
-        </p:nvSpPr>
-        <p:spPr>
-          <a:xfrm>
-            <a:off x="3200400" y="6309360"/>
-            <a:ext cx="1828800" cy="457200"/>
-          </a:xfrm>
-          <a:prstGeom prst="rect">
-            <a:avLst/>
-          </a:prstGeom>
-          <a:noFill/>
-        </p:spPr>
-        <p:txBody>
-          <a:bodyPr wrap="none">
-            <a:spAutoFit/>
-          </a:bodyPr>
-          <a:lstStyle/>
-          <a:p>
-            <a:pPr>
-              <a:defRPr sz="1400">
-                <a:solidFill>
-                  <a:srgbClr val="FFDF8C"/>
-                </a:solidFill>
-                <a:latin typeface="Microsoft YaHei"/>
-              </a:defRPr>
-            </a:pPr>
-            <a:r>
-              <a:t>任务复杂度</a:t>
-            </a:r>
-          </a:p>
-        </p:txBody>
-      </p:sp>
-      <p:sp>
-        <p:nvSpPr>
-          <p:cNvPr id="10" name="Rounded Rectangle 9"/>
-          <p:cNvSpPr/>
-          <p:nvPr/>
-        </p:nvSpPr>
-        <p:spPr>
-          <a:xfrm>
-            <a:off x="1097280" y="1828800"/>
-            <a:ext cx="2377440" cy="2011680"/>
-          </a:xfrm>
-          <a:prstGeom prst="roundRect">
-            <a:avLst/>
-          </a:prstGeom>
-          <a:solidFill>
-            <a:srgbClr val="1C3350"/>
-          </a:solidFill>
-          <a:ln w="12700">
-            <a:solidFill>
-              <a:srgbClr val="3A5575"/>
-            </a:solidFill>
-          </a:ln>
-        </p:spPr>
-        <p:style>
-          <a:lnRef idx="1">
-            <a:schemeClr val="accent1"/>
-          </a:lnRef>
-          <a:fillRef idx="3">
-            <a:schemeClr val="accent1"/>
-          </a:fillRef>
-          <a:effectRef idx="2">
-            <a:schemeClr val="accent1"/>
-          </a:effectRef>
-          <a:fontRef idx="minor">
-            <a:schemeClr val="lt1"/>
-          </a:fontRef>
-        </p:style>
-        <p:txBody>
-          <a:bodyPr rtlCol="0" anchor="ctr"/>
-          <a:lstStyle/>
-          <a:p>
-            <a:pPr algn="ctr"/>
-          </a:p>
-        </p:txBody>
-      </p:sp>
-      <p:sp>
-        <p:nvSpPr>
-          <p:cNvPr id="11" name="TextBox 10"/>
-          <p:cNvSpPr txBox="1"/>
-          <p:nvPr/>
-        </p:nvSpPr>
-        <p:spPr>
-          <a:xfrm>
-            <a:off x="1188720" y="1920240"/>
-            <a:ext cx="2194560" cy="365760"/>
-          </a:xfrm>
-          <a:prstGeom prst="rect">
-            <a:avLst/>
-          </a:prstGeom>
-          <a:noFill/>
-        </p:spPr>
-        <p:txBody>
-          <a:bodyPr wrap="none">
-            <a:spAutoFit/>
-          </a:bodyPr>
-          <a:lstStyle/>
-          <a:p>
-            <a:pPr>
-              <a:defRPr sz="1400">
-                <a:solidFill>
-                  <a:srgbClr val="FFFFFF"/>
-                </a:solidFill>
-                <a:latin typeface="Microsoft YaHei"/>
-              </a:defRPr>
-            </a:pPr>
-            <a:r>
-              <a:t>简单场景</a:t>
-            </a:r>
-          </a:p>
-        </p:txBody>
-      </p:sp>
-      <p:sp>
-        <p:nvSpPr>
-          <p:cNvPr id="12" name="TextBox 11"/>
-          <p:cNvSpPr txBox="1"/>
-          <p:nvPr/>
-        </p:nvSpPr>
-        <p:spPr>
-          <a:xfrm>
-            <a:off x="2926080" y="1920240"/>
-            <a:ext cx="457200" cy="457200"/>
-          </a:xfrm>
-          <a:prstGeom prst="rect">
-            <a:avLst/>
-          </a:prstGeom>
-          <a:noFill/>
-        </p:spPr>
-        <p:txBody>
-          <a:bodyPr wrap="none">
-            <a:spAutoFit/>
-          </a:bodyPr>
-          <a:lstStyle/>
-          <a:p>
-            <a:pPr>
-              <a:defRPr sz="1800">
-                <a:solidFill>
-                  <a:srgbClr val="D0D0D0"/>
-                </a:solidFill>
-                <a:latin typeface="Segoe UI Symbol"/>
-              </a:defRPr>
-            </a:pPr>
-            <a:r>
-              <a:t>☑</a:t>
-            </a:r>
-          </a:p>
-        </p:txBody>
-      </p:sp>
-      <p:sp>
-        <p:nvSpPr>
-          <p:cNvPr id="13" name="TextBox 12"/>
-          <p:cNvSpPr txBox="1"/>
-          <p:nvPr/>
-        </p:nvSpPr>
-        <p:spPr>
-          <a:xfrm>
-            <a:off x="1097280" y="2377440"/>
-            <a:ext cx="2377440" cy="548640"/>
-          </a:xfrm>
-          <a:prstGeom prst="rect">
-            <a:avLst/>
-          </a:prstGeom>
-          <a:noFill/>
-        </p:spPr>
-        <p:txBody>
-          <a:bodyPr wrap="none">
-            <a:spAutoFit/>
-          </a:bodyPr>
-          <a:lstStyle/>
-          <a:p>
-            <a:pPr algn="ctr">
-              <a:defRPr sz="2600" b="1">
-                <a:solidFill>
-                  <a:srgbClr val="FFDF8C"/>
-                </a:solidFill>
-                <a:latin typeface="Microsoft YaHei"/>
-              </a:defRPr>
-            </a:pPr>
-            <a:r>
-              <a:t>50% 提效</a:t>
-            </a:r>
-          </a:p>
-        </p:txBody>
-      </p:sp>
-      <p:sp>
-        <p:nvSpPr>
-          <p:cNvPr id="14" name="TextBox 13"/>
-          <p:cNvSpPr txBox="1"/>
-          <p:nvPr/>
-        </p:nvSpPr>
-        <p:spPr>
-          <a:xfrm>
-            <a:off x="1097280" y="3017520"/>
-            <a:ext cx="2377440" cy="365760"/>
-          </a:xfrm>
-          <a:prstGeom prst="rect">
-            <a:avLst/>
-          </a:prstGeom>
-          <a:noFill/>
-        </p:spPr>
-        <p:txBody>
-          <a:bodyPr wrap="none">
-            <a:spAutoFit/>
-          </a:bodyPr>
-          <a:lstStyle/>
-          <a:p>
-            <a:pPr algn="ctr">
-              <a:defRPr sz="1300">
-                <a:solidFill>
-                  <a:srgbClr val="D0D0D0"/>
-                </a:solidFill>
-                <a:latin typeface="Microsoft YaHei"/>
-              </a:defRPr>
-            </a:pPr>
-            <a:r>
-              <a:t>辅助逻辑，高收益</a:t>
-            </a:r>
-          </a:p>
-        </p:txBody>
-      </p:sp>
-      <p:sp>
-        <p:nvSpPr>
-          <p:cNvPr id="15" name="Rounded Rectangle 14"/>
-          <p:cNvSpPr/>
-          <p:nvPr/>
-        </p:nvSpPr>
-        <p:spPr>
-          <a:xfrm>
-            <a:off x="1097280" y="4023360"/>
-            <a:ext cx="2377440" cy="2011680"/>
-          </a:xfrm>
-          <a:prstGeom prst="roundRect">
-            <a:avLst/>
-          </a:prstGeom>
-          <a:solidFill>
-            <a:srgbClr val="1C3350"/>
-          </a:solidFill>
-          <a:ln w="12700">
-            <a:solidFill>
-              <a:srgbClr val="3A5575"/>
-            </a:solidFill>
-          </a:ln>
-        </p:spPr>
-        <p:style>
-          <a:lnRef idx="1">
-            <a:schemeClr val="accent1"/>
-          </a:lnRef>
-          <a:fillRef idx="3">
-            <a:schemeClr val="accent1"/>
-          </a:fillRef>
-          <a:effectRef idx="2">
-            <a:schemeClr val="accent1"/>
-          </a:effectRef>
-          <a:fontRef idx="minor">
-            <a:schemeClr val="lt1"/>
-          </a:fontRef>
-        </p:style>
-        <p:txBody>
-          <a:bodyPr rtlCol="0" anchor="ctr"/>
-          <a:lstStyle/>
-          <a:p>
-            <a:pPr algn="ctr"/>
-          </a:p>
-        </p:txBody>
-      </p:sp>
-      <p:sp>
-        <p:nvSpPr>
-          <p:cNvPr id="16" name="TextBox 15"/>
-          <p:cNvSpPr txBox="1"/>
-          <p:nvPr/>
-        </p:nvSpPr>
-        <p:spPr>
-          <a:xfrm>
-            <a:off x="1188720" y="4114800"/>
-            <a:ext cx="2194560" cy="365760"/>
-          </a:xfrm>
-          <a:prstGeom prst="rect">
-            <a:avLst/>
-          </a:prstGeom>
-          <a:noFill/>
-        </p:spPr>
-        <p:txBody>
-          <a:bodyPr wrap="none">
-            <a:spAutoFit/>
-          </a:bodyPr>
-          <a:lstStyle/>
-          <a:p>
-            <a:pPr>
-              <a:defRPr sz="1400">
-                <a:solidFill>
-                  <a:srgbClr val="FFFFFF"/>
-                </a:solidFill>
-                <a:latin typeface="Microsoft YaHei"/>
-              </a:defRPr>
-            </a:pPr>
-            <a:r>
-              <a:t>中等场景</a:t>
-            </a:r>
-          </a:p>
-        </p:txBody>
-      </p:sp>
-      <p:sp>
-        <p:nvSpPr>
-          <p:cNvPr id="17" name="TextBox 16"/>
-          <p:cNvSpPr txBox="1"/>
-          <p:nvPr/>
-        </p:nvSpPr>
-        <p:spPr>
-          <a:xfrm>
-            <a:off x="2926080" y="4114800"/>
-            <a:ext cx="457200" cy="457200"/>
-          </a:xfrm>
-          <a:prstGeom prst="rect">
-            <a:avLst/>
-          </a:prstGeom>
-          <a:noFill/>
-        </p:spPr>
-        <p:txBody>
-          <a:bodyPr wrap="none">
-            <a:spAutoFit/>
-          </a:bodyPr>
-          <a:lstStyle/>
-          <a:p>
-            <a:pPr>
-              <a:defRPr sz="1800">
-                <a:solidFill>
-                  <a:srgbClr val="D0D0D0"/>
-                </a:solidFill>
-                <a:latin typeface="Segoe UI Symbol"/>
-              </a:defRPr>
-            </a:pPr>
-            <a:r>
-              <a:t>⊖</a:t>
-            </a:r>
-          </a:p>
-        </p:txBody>
-      </p:sp>
-      <p:sp>
-        <p:nvSpPr>
-          <p:cNvPr id="18" name="TextBox 17"/>
-          <p:cNvSpPr txBox="1"/>
-          <p:nvPr/>
-        </p:nvSpPr>
-        <p:spPr>
-          <a:xfrm>
-            <a:off x="1097280" y="4572000"/>
-            <a:ext cx="2377440" cy="548640"/>
-          </a:xfrm>
-          <a:prstGeom prst="rect">
-            <a:avLst/>
-          </a:prstGeom>
-          <a:noFill/>
-        </p:spPr>
-        <p:txBody>
-          <a:bodyPr wrap="none">
-            <a:spAutoFit/>
-          </a:bodyPr>
-          <a:lstStyle/>
-          <a:p>
-            <a:pPr algn="ctr">
-              <a:defRPr sz="2600" b="1">
-                <a:solidFill>
-                  <a:srgbClr val="FFDF8C"/>
-                </a:solidFill>
-                <a:latin typeface="Microsoft YaHei"/>
-              </a:defRPr>
-            </a:pPr>
-            <a:r>
-              <a:t>无提升</a:t>
-            </a:r>
-          </a:p>
-        </p:txBody>
-      </p:sp>
-      <p:sp>
-        <p:nvSpPr>
-          <p:cNvPr id="19" name="TextBox 18"/>
-          <p:cNvSpPr txBox="1"/>
-          <p:nvPr/>
-        </p:nvSpPr>
-        <p:spPr>
-          <a:xfrm>
-            <a:off x="1097280" y="5212080"/>
-            <a:ext cx="2377440" cy="365760"/>
-          </a:xfrm>
-          <a:prstGeom prst="rect">
-            <a:avLst/>
-          </a:prstGeom>
-          <a:noFill/>
-        </p:spPr>
-        <p:txBody>
-          <a:bodyPr wrap="none">
-            <a:spAutoFit/>
-          </a:bodyPr>
-          <a:lstStyle/>
-          <a:p>
-            <a:pPr algn="ctr">
-              <a:defRPr sz="1300">
-                <a:solidFill>
-                  <a:srgbClr val="D0D0D0"/>
-                </a:solidFill>
-                <a:latin typeface="Microsoft YaHei"/>
-              </a:defRPr>
-            </a:pPr>
-            <a:r>
-              <a:t>效率持平</a:t>
-            </a:r>
-          </a:p>
-        </p:txBody>
-      </p:sp>
-      <p:sp>
-        <p:nvSpPr>
-          <p:cNvPr id="20" name="Rounded Rectangle 19"/>
-          <p:cNvSpPr/>
-          <p:nvPr/>
-        </p:nvSpPr>
-        <p:spPr>
-          <a:xfrm>
-            <a:off x="3657600" y="1828800"/>
-            <a:ext cx="2377440" cy="2011680"/>
-          </a:xfrm>
-          <a:prstGeom prst="roundRect">
-            <a:avLst/>
-          </a:prstGeom>
-          <a:solidFill>
-            <a:srgbClr val="253A45"/>
-          </a:solidFill>
-          <a:ln w="19050">
-            <a:solidFill>
-              <a:srgbClr val="FFDF8C"/>
-            </a:solidFill>
-          </a:ln>
-        </p:spPr>
-        <p:style>
-          <a:lnRef idx="1">
-            <a:schemeClr val="accent1"/>
-          </a:lnRef>
-          <a:fillRef idx="3">
-            <a:schemeClr val="accent1"/>
-          </a:fillRef>
-          <a:effectRef idx="2">
-            <a:schemeClr val="accent1"/>
-          </a:effectRef>
-          <a:fontRef idx="minor">
-            <a:schemeClr val="lt1"/>
-          </a:fontRef>
-        </p:style>
-        <p:txBody>
-          <a:bodyPr rtlCol="0" anchor="ctr"/>
-          <a:lstStyle/>
-          <a:p>
-            <a:pPr algn="ctr"/>
-          </a:p>
-        </p:txBody>
-      </p:sp>
-      <p:sp>
-        <p:nvSpPr>
-          <p:cNvPr id="21" name="TextBox 20"/>
-          <p:cNvSpPr txBox="1"/>
-          <p:nvPr/>
-        </p:nvSpPr>
-        <p:spPr>
-          <a:xfrm>
-            <a:off x="3749040" y="1920240"/>
-            <a:ext cx="2194560" cy="365760"/>
-          </a:xfrm>
-          <a:prstGeom prst="rect">
-            <a:avLst/>
-          </a:prstGeom>
-          <a:noFill/>
-        </p:spPr>
-        <p:txBody>
-          <a:bodyPr wrap="none">
-            <a:spAutoFit/>
-          </a:bodyPr>
-          <a:lstStyle/>
-          <a:p>
-            <a:pPr>
-              <a:defRPr sz="1400">
-                <a:solidFill>
-                  <a:srgbClr val="FFFFFF"/>
-                </a:solidFill>
-                <a:latin typeface="Microsoft YaHei"/>
-              </a:defRPr>
-            </a:pPr>
-            <a:r>
-              <a:t>复杂场景</a:t>
-            </a:r>
-          </a:p>
-        </p:txBody>
-      </p:sp>
-      <p:sp>
-        <p:nvSpPr>
-          <p:cNvPr id="22" name="TextBox 21"/>
-          <p:cNvSpPr txBox="1"/>
-          <p:nvPr/>
-        </p:nvSpPr>
-        <p:spPr>
-          <a:xfrm>
-            <a:off x="5486400" y="1920240"/>
-            <a:ext cx="457200" cy="457200"/>
-          </a:xfrm>
-          <a:prstGeom prst="rect">
-            <a:avLst/>
-          </a:prstGeom>
-          <a:noFill/>
-        </p:spPr>
-        <p:txBody>
-          <a:bodyPr wrap="none">
-            <a:spAutoFit/>
-          </a:bodyPr>
-          <a:lstStyle/>
-          <a:p>
-            <a:pPr>
-              <a:defRPr sz="1800">
-                <a:solidFill>
-                  <a:srgbClr val="FFDF8C"/>
-                </a:solidFill>
-                <a:latin typeface="Segoe UI Symbol"/>
-              </a:defRPr>
-            </a:pPr>
-            <a:r>
-              <a:t>⚠</a:t>
-            </a:r>
-          </a:p>
-        </p:txBody>
-      </p:sp>
-      <p:sp>
-        <p:nvSpPr>
-          <p:cNvPr id="23" name="TextBox 22"/>
-          <p:cNvSpPr txBox="1"/>
-          <p:nvPr/>
-        </p:nvSpPr>
-        <p:spPr>
-          <a:xfrm>
-            <a:off x="3657600" y="2377440"/>
-            <a:ext cx="2377440" cy="548640"/>
-          </a:xfrm>
-          <a:prstGeom prst="rect">
-            <a:avLst/>
-          </a:prstGeom>
-          <a:noFill/>
-        </p:spPr>
-        <p:txBody>
-          <a:bodyPr wrap="none">
-            <a:spAutoFit/>
-          </a:bodyPr>
-          <a:lstStyle/>
-          <a:p>
-            <a:pPr algn="ctr">
-              <a:defRPr sz="2600" b="1">
-                <a:solidFill>
-                  <a:srgbClr val="FFDF8C"/>
-                </a:solidFill>
-                <a:latin typeface="Microsoft YaHei"/>
-              </a:defRPr>
-            </a:pPr>
-            <a:r>
-              <a:t>工作量激增</a:t>
-            </a:r>
-          </a:p>
-        </p:txBody>
-      </p:sp>
-      <p:sp>
-        <p:nvSpPr>
-          <p:cNvPr id="24" name="TextBox 23"/>
-          <p:cNvSpPr txBox="1"/>
-          <p:nvPr/>
-        </p:nvSpPr>
-        <p:spPr>
-          <a:xfrm>
-            <a:off x="3657600" y="3017520"/>
-            <a:ext cx="2377440" cy="365760"/>
-          </a:xfrm>
-          <a:prstGeom prst="rect">
-            <a:avLst/>
-          </a:prstGeom>
-          <a:noFill/>
-        </p:spPr>
-        <p:txBody>
-          <a:bodyPr wrap="none">
-            <a:spAutoFit/>
-          </a:bodyPr>
-          <a:lstStyle/>
-          <a:p>
-            <a:pPr algn="ctr">
-              <a:defRPr sz="1300">
-                <a:solidFill>
-                  <a:srgbClr val="D0D0D0"/>
-                </a:solidFill>
-                <a:latin typeface="Microsoft YaHei"/>
-              </a:defRPr>
-            </a:pPr>
-            <a:r>
-              <a:t>效率倒挂，风险高</a:t>
-            </a:r>
-          </a:p>
-        </p:txBody>
-      </p:sp>
-      <p:sp>
-        <p:nvSpPr>
-          <p:cNvPr id="25" name="Rounded Rectangle 24"/>
-          <p:cNvSpPr/>
-          <p:nvPr/>
-        </p:nvSpPr>
-        <p:spPr>
-          <a:xfrm>
-            <a:off x="3657600" y="4023360"/>
-            <a:ext cx="2377440" cy="2011680"/>
-          </a:xfrm>
-          <a:prstGeom prst="roundRect">
-            <a:avLst/>
-          </a:prstGeom>
-          <a:solidFill>
-            <a:srgbClr val="1C3350"/>
-          </a:solidFill>
-          <a:ln w="12700">
-            <a:solidFill>
-              <a:srgbClr val="3A5575"/>
-            </a:solidFill>
-          </a:ln>
-        </p:spPr>
-        <p:style>
-          <a:lnRef idx="1">
-            <a:schemeClr val="accent1"/>
-          </a:lnRef>
-          <a:fillRef idx="3">
-            <a:schemeClr val="accent1"/>
-          </a:fillRef>
-          <a:effectRef idx="2">
-            <a:schemeClr val="accent1"/>
-          </a:effectRef>
-          <a:fontRef idx="minor">
-            <a:schemeClr val="lt1"/>
-          </a:fontRef>
-        </p:style>
-        <p:txBody>
-          <a:bodyPr rtlCol="0" anchor="ctr"/>
-          <a:lstStyle/>
-          <a:p>
-            <a:pPr algn="ctr"/>
-          </a:p>
-        </p:txBody>
-      </p:sp>
-      <p:sp>
-        <p:nvSpPr>
-          <p:cNvPr id="26" name="TextBox 25"/>
-          <p:cNvSpPr txBox="1"/>
-          <p:nvPr/>
-        </p:nvSpPr>
-        <p:spPr>
-          <a:xfrm>
-            <a:off x="3749040" y="4114800"/>
-            <a:ext cx="2194560" cy="365760"/>
-          </a:xfrm>
-          <a:prstGeom prst="rect">
-            <a:avLst/>
-          </a:prstGeom>
-          <a:noFill/>
-        </p:spPr>
-        <p:txBody>
-          <a:bodyPr wrap="none">
-            <a:spAutoFit/>
-          </a:bodyPr>
-          <a:lstStyle/>
-          <a:p>
-            <a:pPr>
-              <a:defRPr sz="1400">
-                <a:solidFill>
-                  <a:srgbClr val="FFFFFF"/>
-                </a:solidFill>
-                <a:latin typeface="Microsoft YaHei"/>
-              </a:defRPr>
-            </a:pPr>
-            <a:r>
-              <a:t>应用禁区</a:t>
-            </a:r>
-          </a:p>
-        </p:txBody>
-      </p:sp>
-      <p:sp>
-        <p:nvSpPr>
-          <p:cNvPr id="27" name="TextBox 26"/>
-          <p:cNvSpPr txBox="1"/>
-          <p:nvPr/>
-        </p:nvSpPr>
-        <p:spPr>
-          <a:xfrm>
-            <a:off x="5486400" y="4114800"/>
-            <a:ext cx="457200" cy="457200"/>
-          </a:xfrm>
-          <a:prstGeom prst="rect">
-            <a:avLst/>
-          </a:prstGeom>
-          <a:noFill/>
-        </p:spPr>
-        <p:txBody>
-          <a:bodyPr wrap="none">
-            <a:spAutoFit/>
-          </a:bodyPr>
-          <a:lstStyle/>
-          <a:p>
-            <a:pPr>
-              <a:defRPr sz="1800">
-                <a:solidFill>
-                  <a:srgbClr val="D0D0D0"/>
-                </a:solidFill>
-                <a:latin typeface="Segoe UI Symbol"/>
-              </a:defRPr>
-            </a:pPr>
-            <a:r>
-              <a:t>⊘</a:t>
-            </a:r>
-          </a:p>
-        </p:txBody>
-      </p:sp>
-      <p:sp>
-        <p:nvSpPr>
-          <p:cNvPr id="28" name="TextBox 27"/>
-          <p:cNvSpPr txBox="1"/>
-          <p:nvPr/>
-        </p:nvSpPr>
-        <p:spPr>
-          <a:xfrm>
-            <a:off x="3657600" y="5212080"/>
-            <a:ext cx="2377440" cy="365760"/>
-          </a:xfrm>
-          <a:prstGeom prst="rect">
-            <a:avLst/>
-          </a:prstGeom>
-          <a:noFill/>
-        </p:spPr>
-        <p:txBody>
-          <a:bodyPr wrap="none">
-            <a:spAutoFit/>
-          </a:bodyPr>
-          <a:lstStyle/>
-          <a:p>
-            <a:pPr algn="ctr">
-              <a:defRPr sz="1300">
-                <a:solidFill>
-                  <a:srgbClr val="D0D0D0"/>
-                </a:solidFill>
-                <a:latin typeface="Microsoft YaHei"/>
-              </a:defRPr>
-            </a:pPr>
-            <a:r>
-              <a:t>不可靠，需人工完全接管</a:t>
-            </a:r>
-          </a:p>
-        </p:txBody>
-      </p:sp>
-      <p:sp>
-        <p:nvSpPr>
-          <p:cNvPr id="29" name="TextBox 28"/>
-          <p:cNvSpPr txBox="1"/>
-          <p:nvPr/>
-        </p:nvSpPr>
-        <p:spPr>
-          <a:xfrm>
-            <a:off x="4389120" y="4389120"/>
-            <a:ext cx="1005840" cy="914400"/>
-          </a:xfrm>
-          <a:prstGeom prst="rect">
-            <a:avLst/>
-          </a:prstGeom>
-          <a:noFill/>
-        </p:spPr>
-        <p:txBody>
-          <a:bodyPr wrap="none">
-            <a:spAutoFit/>
-          </a:bodyPr>
-          <a:lstStyle/>
-          <a:p>
-            <a:pPr algn="ctr">
-              <a:defRPr sz="4500">
-                <a:solidFill>
-                  <a:srgbClr val="D0D0D0"/>
-                </a:solidFill>
-                <a:latin typeface="Segoe UI Emoji"/>
-              </a:defRPr>
-            </a:pPr>
-            <a:r>
-              <a:t>🔗</a:t>
-            </a:r>
-          </a:p>
-        </p:txBody>
-      </p:sp>
-      <p:cxnSp>
-        <p:nvCxnSpPr>
-          <p:cNvPr id="30" name="Connector 29"/>
-          <p:cNvCxnSpPr/>
-          <p:nvPr/>
-        </p:nvCxnSpPr>
-        <p:spPr>
-          <a:xfrm>
-            <a:off x="4572000" y="4480560"/>
-            <a:ext cx="640080" cy="640080"/>
-          </a:xfrm>
-          <a:prstGeom prst="line">
-            <a:avLst/>
-          </a:prstGeom>
-          <a:ln w="38100">
-            <a:solidFill>
-              <a:srgbClr val="FFDF8C"/>
-            </a:solidFill>
-          </a:ln>
-        </p:spPr>
-        <p:style>
-          <a:lnRef idx="2">
-            <a:schemeClr val="accent1"/>
-          </a:lnRef>
-          <a:fillRef idx="0">
-            <a:schemeClr val="accent1"/>
-          </a:fillRef>
-          <a:effectRef idx="1">
-            <a:schemeClr val="accent1"/>
-          </a:effectRef>
-          <a:fontRef idx="minor">
-            <a:schemeClr val="tx1"/>
-          </a:fontRef>
-        </p:style>
-      </p:cxnSp>
-      <p:cxnSp>
-        <p:nvCxnSpPr>
-          <p:cNvPr id="31" name="Connector 30"/>
-          <p:cNvCxnSpPr/>
-          <p:nvPr/>
-        </p:nvCxnSpPr>
-        <p:spPr>
-          <a:xfrm flipV="1">
-            <a:off x="1371600" y="2743200"/>
-            <a:ext cx="1920240" cy="914400"/>
-          </a:xfrm>
-          <a:prstGeom prst="curvedConnector3">
-            <a:avLst/>
-          </a:prstGeom>
-          <a:ln w="25400">
-            <a:solidFill>
-              <a:srgbClr val="FFDF8C"/>
-            </a:solidFill>
-          </a:ln>
-        </p:spPr>
-        <p:style>
-          <a:lnRef idx="2">
-            <a:schemeClr val="accent1"/>
-          </a:lnRef>
-          <a:fillRef idx="0">
-            <a:schemeClr val="accent1"/>
-          </a:fillRef>
-          <a:effectRef idx="1">
-            <a:schemeClr val="accent1"/>
-          </a:effectRef>
-          <a:fontRef idx="minor">
-            <a:schemeClr val="tx1"/>
-          </a:fontRef>
-        </p:style>
-      </p:cxnSp>
-      <p:cxnSp>
-        <p:nvCxnSpPr>
-          <p:cNvPr id="32" name="Connector 31"/>
-          <p:cNvCxnSpPr/>
-          <p:nvPr/>
-        </p:nvCxnSpPr>
-        <p:spPr>
-          <a:xfrm>
-            <a:off x="3840480" y="2286000"/>
-            <a:ext cx="2011680" cy="1371600"/>
-          </a:xfrm>
-          <a:prstGeom prst="curvedConnector3">
-            <a:avLst/>
-          </a:prstGeom>
-          <a:ln w="25400">
-            <a:solidFill>
-              <a:srgbClr val="FFDF8C"/>
-            </a:solidFill>
-          </a:ln>
-        </p:spPr>
-        <p:style>
-          <a:lnRef idx="2">
-            <a:schemeClr val="accent1"/>
-          </a:lnRef>
-          <a:fillRef idx="0">
-            <a:schemeClr val="accent1"/>
-          </a:fillRef>
-          <a:effectRef idx="1">
-            <a:schemeClr val="accent1"/>
-          </a:effectRef>
-          <a:fontRef idx="minor">
-            <a:schemeClr val="tx1"/>
-          </a:fontRef>
-        </p:style>
-      </p:cxnSp>
-      <p:sp>
-        <p:nvSpPr>
-          <p:cNvPr id="33" name="Rounded Rectangle 32"/>
-          <p:cNvSpPr/>
-          <p:nvPr/>
-        </p:nvSpPr>
-        <p:spPr>
-          <a:xfrm>
-            <a:off x="6858000" y="1463040"/>
-            <a:ext cx="4846320" cy="1645920"/>
-          </a:xfrm>
-          <a:prstGeom prst="roundRect">
-            <a:avLst/>
-          </a:prstGeom>
-          <a:solidFill>
-            <a:srgbClr val="152842"/>
-          </a:solidFill>
-          <a:ln w="12700">
-            <a:solidFill>
-              <a:srgbClr val="3A5575"/>
-            </a:solidFill>
-          </a:ln>
-        </p:spPr>
-        <p:style>
-          <a:lnRef idx="1">
-            <a:schemeClr val="accent1"/>
-          </a:lnRef>
-          <a:fillRef idx="3">
-            <a:schemeClr val="accent1"/>
-          </a:fillRef>
-          <a:effectRef idx="2">
-            <a:schemeClr val="accent1"/>
-          </a:effectRef>
-          <a:fontRef idx="minor">
-            <a:schemeClr val="lt1"/>
-          </a:fontRef>
-        </p:style>
-        <p:txBody>
-          <a:bodyPr rtlCol="0" anchor="ctr"/>
-          <a:lstStyle/>
-          <a:p>
-            <a:pPr algn="ctr"/>
-          </a:p>
-        </p:txBody>
-      </p:sp>
-      <p:sp>
-        <p:nvSpPr>
-          <p:cNvPr id="34" name="TextBox 33"/>
-          <p:cNvSpPr txBox="1"/>
-          <p:nvPr/>
-        </p:nvSpPr>
-        <p:spPr>
-          <a:xfrm>
-            <a:off x="6858000" y="1554480"/>
-            <a:ext cx="4846320" cy="365760"/>
-          </a:xfrm>
-          <a:prstGeom prst="rect">
-            <a:avLst/>
-          </a:prstGeom>
-          <a:noFill/>
-        </p:spPr>
-        <p:txBody>
-          <a:bodyPr wrap="none">
-            <a:spAutoFit/>
-          </a:bodyPr>
-          <a:lstStyle/>
-          <a:p>
-            <a:pPr algn="ctr">
-              <a:defRPr sz="1600" b="1">
-                <a:solidFill>
-                  <a:srgbClr val="FFDF8C"/>
-                </a:solidFill>
-                <a:latin typeface="Microsoft YaHei"/>
-              </a:defRPr>
-            </a:pPr>
-            <a:r>
-              <a:t>四大瓶颈</a:t>
-            </a:r>
-          </a:p>
-        </p:txBody>
-      </p:sp>
-      <p:sp>
-        <p:nvSpPr>
-          <p:cNvPr id="35" name="TextBox 34"/>
-          <p:cNvSpPr txBox="1"/>
-          <p:nvPr/>
-        </p:nvSpPr>
-        <p:spPr>
-          <a:xfrm>
-            <a:off x="7132320" y="2011680"/>
-            <a:ext cx="2286000" cy="365760"/>
-          </a:xfrm>
-          <a:prstGeom prst="rect">
-            <a:avLst/>
-          </a:prstGeom>
-          <a:noFill/>
-        </p:spPr>
-        <p:txBody>
-          <a:bodyPr wrap="none">
-            <a:spAutoFit/>
-          </a:bodyPr>
-          <a:lstStyle/>
-          <a:p>
-            <a:pPr>
-              <a:defRPr sz="1400">
-                <a:solidFill>
-                  <a:srgbClr val="FFFFFF"/>
-                </a:solidFill>
-                <a:latin typeface="Microsoft YaHei"/>
-              </a:defRPr>
-            </a:pPr>
-            <a:r>
-              <a:t>☁  数据字典幻觉</a:t>
-            </a:r>
-          </a:p>
-        </p:txBody>
-      </p:sp>
-      <p:sp>
-        <p:nvSpPr>
-          <p:cNvPr id="36" name="TextBox 35"/>
-          <p:cNvSpPr txBox="1"/>
-          <p:nvPr/>
-        </p:nvSpPr>
-        <p:spPr>
-          <a:xfrm>
-            <a:off x="9418320" y="2011680"/>
-            <a:ext cx="2286000" cy="365760"/>
-          </a:xfrm>
-          <a:prstGeom prst="rect">
-            <a:avLst/>
-          </a:prstGeom>
-          <a:noFill/>
-        </p:spPr>
-        <p:txBody>
-          <a:bodyPr wrap="none">
-            <a:spAutoFit/>
-          </a:bodyPr>
-          <a:lstStyle/>
-          <a:p>
-            <a:pPr>
-              <a:defRPr sz="1400">
-                <a:solidFill>
-                  <a:srgbClr val="FFFFFF"/>
-                </a:solidFill>
-                <a:latin typeface="Microsoft YaHei"/>
-              </a:defRPr>
-            </a:pPr>
-            <a:r>
-              <a:t>🔗  接口规则缺失</a:t>
-            </a:r>
-          </a:p>
-        </p:txBody>
-      </p:sp>
-      <p:sp>
-        <p:nvSpPr>
-          <p:cNvPr id="37" name="TextBox 36"/>
-          <p:cNvSpPr txBox="1"/>
-          <p:nvPr/>
-        </p:nvSpPr>
-        <p:spPr>
-          <a:xfrm>
-            <a:off x="7132320" y="2468880"/>
-            <a:ext cx="2286000" cy="365760"/>
-          </a:xfrm>
-          <a:prstGeom prst="rect">
-            <a:avLst/>
-          </a:prstGeom>
-          <a:noFill/>
-        </p:spPr>
-        <p:txBody>
-          <a:bodyPr wrap="none">
-            <a:spAutoFit/>
-          </a:bodyPr>
-          <a:lstStyle/>
-          <a:p>
-            <a:pPr>
-              <a:defRPr sz="1400">
-                <a:solidFill>
-                  <a:srgbClr val="FFFFFF"/>
-                </a:solidFill>
-                <a:latin typeface="Microsoft YaHei"/>
-              </a:defRPr>
-            </a:pPr>
-            <a:r>
-              <a:t>📈  修复成本反超</a:t>
-            </a:r>
-          </a:p>
-        </p:txBody>
-      </p:sp>
-      <p:sp>
-        <p:nvSpPr>
-          <p:cNvPr id="38" name="TextBox 37"/>
-          <p:cNvSpPr txBox="1"/>
-          <p:nvPr/>
-        </p:nvSpPr>
-        <p:spPr>
-          <a:xfrm>
-            <a:off x="9418320" y="2468880"/>
-            <a:ext cx="2286000" cy="365760"/>
-          </a:xfrm>
-          <a:prstGeom prst="rect">
-            <a:avLst/>
-          </a:prstGeom>
-          <a:noFill/>
-        </p:spPr>
-        <p:txBody>
-          <a:bodyPr wrap="none">
-            <a:spAutoFit/>
-          </a:bodyPr>
-          <a:lstStyle/>
-          <a:p>
-            <a:pPr>
-              <a:defRPr sz="1400">
-                <a:solidFill>
-                  <a:srgbClr val="FFFFFF"/>
-                </a:solidFill>
-                <a:latin typeface="Microsoft YaHei"/>
-              </a:defRPr>
-            </a:pPr>
-            <a:r>
-              <a:t>💬  提示词被忽略</a:t>
-            </a:r>
-          </a:p>
-        </p:txBody>
-      </p:sp>
-      <p:sp>
-        <p:nvSpPr>
-          <p:cNvPr id="39" name="Rounded Rectangle 38"/>
-          <p:cNvSpPr/>
-          <p:nvPr/>
-        </p:nvSpPr>
-        <p:spPr>
-          <a:xfrm>
-            <a:off x="6858000" y="3291840"/>
-            <a:ext cx="4846320" cy="1645920"/>
-          </a:xfrm>
-          <a:prstGeom prst="roundRect">
-            <a:avLst/>
-          </a:prstGeom>
-          <a:solidFill>
-            <a:srgbClr val="152842"/>
-          </a:solidFill>
-          <a:ln w="12700">
-            <a:solidFill>
-              <a:srgbClr val="3A5575"/>
-            </a:solidFill>
-          </a:ln>
-        </p:spPr>
-        <p:style>
-          <a:lnRef idx="1">
-            <a:schemeClr val="accent1"/>
-          </a:lnRef>
-          <a:fillRef idx="3">
-            <a:schemeClr val="accent1"/>
-          </a:fillRef>
-          <a:effectRef idx="2">
-            <a:schemeClr val="accent1"/>
-          </a:effectRef>
-          <a:fontRef idx="minor">
-            <a:schemeClr val="lt1"/>
-          </a:fontRef>
-        </p:style>
-        <p:txBody>
-          <a:bodyPr rtlCol="0" anchor="ctr"/>
-          <a:lstStyle/>
-          <a:p>
-            <a:pPr algn="ctr"/>
-          </a:p>
-        </p:txBody>
-      </p:sp>
-      <p:sp>
-        <p:nvSpPr>
-          <p:cNvPr id="40" name="TextBox 39"/>
-          <p:cNvSpPr txBox="1"/>
-          <p:nvPr/>
-        </p:nvSpPr>
-        <p:spPr>
-          <a:xfrm>
-            <a:off x="6858000" y="3383280"/>
-            <a:ext cx="4846320" cy="365760"/>
-          </a:xfrm>
-          <a:prstGeom prst="rect">
-            <a:avLst/>
-          </a:prstGeom>
-          <a:noFill/>
-        </p:spPr>
-        <p:txBody>
-          <a:bodyPr wrap="none">
-            <a:spAutoFit/>
-          </a:bodyPr>
-          <a:lstStyle/>
-          <a:p>
-            <a:pPr algn="ctr">
-              <a:defRPr sz="1600" b="1">
-                <a:solidFill>
-                  <a:srgbClr val="FFDF8C"/>
-                </a:solidFill>
-                <a:latin typeface="Microsoft YaHei"/>
-              </a:defRPr>
-            </a:pPr>
-            <a:r>
-              <a:t>工具选型</a:t>
-            </a:r>
-          </a:p>
-        </p:txBody>
-      </p:sp>
-      <p:sp>
-        <p:nvSpPr>
-          <p:cNvPr id="41" name="TextBox 40"/>
-          <p:cNvSpPr txBox="1"/>
-          <p:nvPr/>
-        </p:nvSpPr>
-        <p:spPr>
-          <a:xfrm>
-            <a:off x="7132320" y="3749039"/>
-            <a:ext cx="2286000" cy="365760"/>
-          </a:xfrm>
-          <a:prstGeom prst="rect">
-            <a:avLst/>
-          </a:prstGeom>
-          <a:noFill/>
-        </p:spPr>
-        <p:txBody>
-          <a:bodyPr wrap="none">
-            <a:spAutoFit/>
-          </a:bodyPr>
-          <a:lstStyle/>
-          <a:p>
-            <a:pPr>
-              <a:defRPr sz="1500" b="1">
-                <a:solidFill>
-                  <a:srgbClr val="FFFFFF"/>
-                </a:solidFill>
-                <a:latin typeface="Microsoft YaHei"/>
-              </a:defRPr>
-            </a:pPr>
-            <a:r>
-              <a:t>⚡ Claude Code</a:t>
-            </a:r>
-          </a:p>
-        </p:txBody>
-      </p:sp>
-      <p:sp>
-        <p:nvSpPr>
-          <p:cNvPr id="42" name="TextBox 41"/>
-          <p:cNvSpPr txBox="1"/>
-          <p:nvPr/>
-        </p:nvSpPr>
-        <p:spPr>
-          <a:xfrm>
-            <a:off x="7132320" y="4114800"/>
-            <a:ext cx="2286000" cy="365760"/>
-          </a:xfrm>
-          <a:prstGeom prst="rect">
-            <a:avLst/>
-          </a:prstGeom>
-          <a:noFill/>
-        </p:spPr>
-        <p:txBody>
-          <a:bodyPr wrap="none">
-            <a:spAutoFit/>
-          </a:bodyPr>
-          <a:lstStyle/>
-          <a:p>
-            <a:pPr>
-              <a:defRPr sz="1400">
-                <a:solidFill>
-                  <a:srgbClr val="FFFFFF"/>
-                </a:solidFill>
-                <a:latin typeface="Microsoft YaHei"/>
-              </a:defRPr>
-            </a:pPr>
-            <a:r>
-              <a:t>☑  业务理解优秀</a:t>
-            </a:r>
-          </a:p>
-        </p:txBody>
-      </p:sp>
-      <p:sp>
-        <p:nvSpPr>
-          <p:cNvPr id="43" name="TextBox 42"/>
-          <p:cNvSpPr txBox="1"/>
-          <p:nvPr/>
-        </p:nvSpPr>
-        <p:spPr>
-          <a:xfrm>
-            <a:off x="7132320" y="4480560"/>
-            <a:ext cx="2286000" cy="365760"/>
-          </a:xfrm>
-          <a:prstGeom prst="rect">
-            <a:avLst/>
-          </a:prstGeom>
-          <a:noFill/>
-        </p:spPr>
-        <p:txBody>
-          <a:bodyPr wrap="none">
-            <a:spAutoFit/>
-          </a:bodyPr>
-          <a:lstStyle/>
-          <a:p>
-            <a:pPr>
-              <a:defRPr sz="1400">
-                <a:solidFill>
-                  <a:srgbClr val="FFFFFF"/>
-                </a:solidFill>
-                <a:latin typeface="Microsoft YaHei"/>
-              </a:defRPr>
-            </a:pPr>
-            <a:r>
-              <a:t>☑  多文件解析强</a:t>
-            </a:r>
-          </a:p>
-        </p:txBody>
-      </p:sp>
-      <p:sp>
-        <p:nvSpPr>
-          <p:cNvPr id="44" name="TextBox 43"/>
-          <p:cNvSpPr txBox="1"/>
-          <p:nvPr/>
-        </p:nvSpPr>
-        <p:spPr>
-          <a:xfrm>
-            <a:off x="9418320" y="3749039"/>
-            <a:ext cx="2286000" cy="365760"/>
-          </a:xfrm>
-          <a:prstGeom prst="rect">
-            <a:avLst/>
-          </a:prstGeom>
-          <a:noFill/>
-        </p:spPr>
-        <p:txBody>
-          <a:bodyPr wrap="none">
-            <a:spAutoFit/>
-          </a:bodyPr>
-          <a:lstStyle/>
-          <a:p>
-            <a:pPr>
-              <a:defRPr sz="1500" b="1">
-                <a:solidFill>
-                  <a:srgbClr val="FFFFFF"/>
-                </a:solidFill>
-                <a:latin typeface="Microsoft YaHei"/>
-              </a:defRPr>
-            </a:pPr>
-            <a:r>
-              <a:t>🤖 Copilot</a:t>
-            </a:r>
-          </a:p>
-        </p:txBody>
-      </p:sp>
-      <p:sp>
-        <p:nvSpPr>
-          <p:cNvPr id="45" name="TextBox 44"/>
-          <p:cNvSpPr txBox="1"/>
-          <p:nvPr/>
-        </p:nvSpPr>
-        <p:spPr>
-          <a:xfrm>
-            <a:off x="9418320" y="4114800"/>
-            <a:ext cx="2286000" cy="365760"/>
-          </a:xfrm>
-          <a:prstGeom prst="rect">
-            <a:avLst/>
-          </a:prstGeom>
-          <a:noFill/>
-        </p:spPr>
-        <p:txBody>
-          <a:bodyPr wrap="none">
-            <a:spAutoFit/>
-          </a:bodyPr>
-          <a:lstStyle/>
-          <a:p>
-            <a:pPr>
-              <a:defRPr sz="1400">
-                <a:solidFill>
-                  <a:srgbClr val="FFFFFF"/>
-                </a:solidFill>
-                <a:latin typeface="Microsoft YaHei"/>
-              </a:defRPr>
-            </a:pPr>
-            <a:r>
-              <a:t>☒  业务理解受限</a:t>
-            </a:r>
-          </a:p>
-        </p:txBody>
-      </p:sp>
-      <p:sp>
-        <p:nvSpPr>
-          <p:cNvPr id="46" name="TextBox 45"/>
-          <p:cNvSpPr txBox="1"/>
-          <p:nvPr/>
-        </p:nvSpPr>
-        <p:spPr>
-          <a:xfrm>
-            <a:off x="9418320" y="4480560"/>
-            <a:ext cx="2286000" cy="365760"/>
-          </a:xfrm>
-          <a:prstGeom prst="rect">
-            <a:avLst/>
-          </a:prstGeom>
-          <a:noFill/>
-        </p:spPr>
-        <p:txBody>
-          <a:bodyPr wrap="none">
-            <a:spAutoFit/>
-          </a:bodyPr>
-          <a:lstStyle/>
-          <a:p>
-            <a:pPr>
-              <a:defRPr sz="1400">
-                <a:solidFill>
-                  <a:srgbClr val="FFFFFF"/>
-                </a:solidFill>
-                <a:latin typeface="Microsoft YaHei"/>
-              </a:defRPr>
-            </a:pPr>
-            <a:r>
-              <a:t>☒  多文件解析弱</a:t>
-            </a:r>
-          </a:p>
-        </p:txBody>
-      </p:sp>
-      <p:sp>
-        <p:nvSpPr>
-          <p:cNvPr id="47" name="Rounded Rectangle 46"/>
-          <p:cNvSpPr/>
-          <p:nvPr/>
-        </p:nvSpPr>
-        <p:spPr>
-          <a:xfrm>
-            <a:off x="6949440" y="5212080"/>
-            <a:ext cx="4846320" cy="1280160"/>
+          <a:xfrm rot="2700000">
+            <a:off x="6583680" y="5532120"/>
+            <a:ext cx="228600" cy="137160"/>
           </a:xfrm>
           <a:prstGeom prst="roundRect">
             <a:avLst/>
@@ -4798,7 +4588,7 @@
           <a:noFill/>
           <a:ln w="19050">
             <a:solidFill>
-              <a:srgbClr val="FFDF8C"/>
+              <a:srgbClr val="000000"/>
             </a:solidFill>
           </a:ln>
         </p:spPr>
@@ -4826,24 +4616,21 @@
       </p:sp>
       <p:sp>
         <p:nvSpPr>
-          <p:cNvPr id="48" name="Rounded Rectangle 47"/>
+          <p:cNvPr id="36" name="Rectangle 35"/>
           <p:cNvSpPr/>
           <p:nvPr/>
         </p:nvSpPr>
         <p:spPr>
           <a:xfrm>
-            <a:off x="6858000" y="5120640"/>
-            <a:ext cx="4846320" cy="1280160"/>
-          </a:xfrm>
-          <a:prstGeom prst="roundRect">
+            <a:off x="6492240" y="5394960"/>
+            <a:ext cx="228600" cy="182880"/>
+          </a:xfrm>
+          <a:prstGeom prst="rect">
             <a:avLst/>
           </a:prstGeom>
-          <a:solidFill>
-            <a:srgbClr val="1C2A35"/>
-          </a:solidFill>
-          <a:ln w="12700">
+          <a:ln w="19050">
             <a:solidFill>
-              <a:srgbClr val="3A5575"/>
+              <a:srgbClr val="000000"/>
             </a:solidFill>
           </a:ln>
         </p:spPr>
@@ -4871,14 +4658,14 @@
       </p:sp>
       <p:sp>
         <p:nvSpPr>
-          <p:cNvPr id="49" name="TextBox 48"/>
+          <p:cNvPr id="37" name="TextBox 36"/>
           <p:cNvSpPr txBox="1"/>
           <p:nvPr/>
         </p:nvSpPr>
         <p:spPr>
           <a:xfrm>
-            <a:off x="7040880" y="5303520"/>
-            <a:ext cx="4480560" cy="1005840"/>
+            <a:off x="7040880" y="4754880"/>
+            <a:ext cx="4389120" cy="1097280"/>
           </a:xfrm>
           <a:prstGeom prst="rect">
             <a:avLst/>
@@ -4891,41 +4678,94 @@
           </a:bodyPr>
           <a:lstStyle/>
           <a:p>
-            <a:r>
-              <a:rPr sz="1500" b="1">
+            <a:pPr>
+              <a:defRPr sz="1300" b="1">
+                <a:latin typeface="Microsoft YaHei"/>
+              </a:defRPr>
+            </a:pPr>
+            <a:r>
+              <a:t>核心痛点与建议</a:t>
+            </a:r>
+          </a:p>
+          <a:p>
+            <a:pPr>
+              <a:spcBef>
+                <a:spcPts val="300"/>
+              </a:spcBef>
+              <a:defRPr sz="1100">
+                <a:latin typeface="Microsoft YaHei"/>
+              </a:defRPr>
+            </a:pPr>
+            <a:r>
+              <a:t> 核心痛点：虚构数据字典与忽略提示词是限制 AI 在 SAP 领域应用的两大死穴。</a:t>
+            </a:r>
+          </a:p>
+          <a:p>
+            <a:pPr>
+              <a:spcBef>
+                <a:spcPts val="300"/>
+              </a:spcBef>
+              <a:defRPr sz="1100">
+                <a:latin typeface="Microsoft YaHei"/>
+              </a:defRPr>
+            </a:pPr>
+            <a:r>
+              <a:t> 专家建议：现阶段 AI 仅适用于辅助编写简单工具脚本，无法应对中高复杂度业务。  中高复杂度业务。</a:t>
+            </a:r>
+          </a:p>
+        </p:txBody>
+      </p:sp>
+      <p:sp>
+        <p:nvSpPr>
+          <p:cNvPr id="38" name="Rounded Rectangle 37"/>
+          <p:cNvSpPr/>
+          <p:nvPr/>
+        </p:nvSpPr>
+        <p:spPr>
+          <a:xfrm>
+            <a:off x="685800" y="6035040"/>
+            <a:ext cx="10820095" cy="457200"/>
+          </a:xfrm>
+          <a:prstGeom prst="roundRect">
+            <a:avLst/>
+          </a:prstGeom>
+          <a:solidFill>
+            <a:srgbClr val="F8F9FA"/>
+          </a:solidFill>
+          <a:ln w="19050">
+            <a:solidFill>
+              <a:srgbClr val="000000"/>
+            </a:solidFill>
+          </a:ln>
+        </p:spPr>
+        <p:style>
+          <a:lnRef idx="1">
+            <a:schemeClr val="accent1"/>
+          </a:lnRef>
+          <a:fillRef idx="3">
+            <a:schemeClr val="accent1"/>
+          </a:fillRef>
+          <a:effectRef idx="2">
+            <a:schemeClr val="accent1"/>
+          </a:effectRef>
+          <a:fontRef idx="minor">
+            <a:schemeClr val="lt1"/>
+          </a:fontRef>
+        </p:style>
+        <p:txBody>
+          <a:bodyPr rtlCol="0" anchor="ctr" lIns="0" rIns="0" tIns="0" bIns="0"/>
+          <a:lstStyle/>
+          <a:p>
+            <a:pPr algn="ctr">
+              <a:defRPr sz="1600" b="1">
                 <a:solidFill>
-                  <a:srgbClr val="FFDF8C"/>
+                  <a:srgbClr val="000000"/>
                 </a:solidFill>
                 <a:latin typeface="Microsoft YaHei"/>
-              </a:rPr>
-              <a:t>核心建议：</a:t>
-            </a:r>
-            <a:r>
-              <a:rPr sz="1500">
-                <a:solidFill>
-                  <a:srgbClr val="FFFFFF"/>
-                </a:solidFill>
-                <a:latin typeface="Microsoft YaHei"/>
-              </a:rPr>
-              <a:t>当前 AI 尚未具备处理 ABAP 中高难度任务的能力，仅推荐用于</a:t>
-            </a:r>
-            <a:r>
-              <a:rPr sz="1500" b="1">
-                <a:solidFill>
-                  <a:srgbClr val="FFDF8C"/>
-                </a:solidFill>
-                <a:latin typeface="Microsoft YaHei"/>
-              </a:rPr>
-              <a:t>辅助简单逻辑</a:t>
-            </a:r>
-            <a:r>
-              <a:rPr sz="1500">
-                <a:solidFill>
-                  <a:srgbClr val="FFFFFF"/>
-                </a:solidFill>
-                <a:latin typeface="Microsoft YaHei"/>
-              </a:rPr>
-              <a:t>。</a:t>
+              </a:defRPr>
+            </a:pPr>
+            <a:r>
+              <a:t>现阶段 AI 仅适用于辅助编写简单工具脚本，无法应对中高复杂度业务。</a:t>
             </a:r>
           </a:p>
         </p:txBody>
